--- a/paper/presentation.pptx
+++ b/paper/presentation.pptx
@@ -2982,7 +2982,7 @@
       </p:sp>
       <p:pic>
         <p:nvPicPr>
-          <p:cNvPr id="3" name="Image 0" descr="/home/user/modern-labor-market-data-submission/paper/figures/fig1_funnel.png">    </p:cNvPr>
+          <p:cNvPr id="3" name="Image 0" descr="/home/runner/work/Modern-Labor-Market-Data-Submission/Modern-Labor-Market-Data-Submission/paper/figures/fig1_funnel.png">    </p:cNvPr>
           <p:cNvPicPr>
             <a:picLocks noChangeAspect="1"/>
           </p:cNvPicPr>
@@ -3041,7 +3041,7 @@
                 <a:ea typeface="Calibri" pitchFamily="34" charset="-122"/>
                 <a:cs typeface="Calibri" pitchFamily="34" charset="-120"/>
               </a:rPr>
-              <a:t>Retrieved: 7</a:t>
+              <a:t>Retrieved: 53</a:t>
             </a:r>
             <a:endParaRPr lang="en-US" sz="1400" dirty="0"/>
           </a:p>

--- a/paper/presentation.pptx
+++ b/paper/presentation.pptx
@@ -3041,7 +3041,7 @@
                 <a:ea typeface="Calibri" pitchFamily="34" charset="-122"/>
                 <a:cs typeface="Calibri" pitchFamily="34" charset="-120"/>
               </a:rPr>
-              <a:t>Retrieved: 53</a:t>
+              <a:t>Retrieved: 58</a:t>
             </a:r>
             <a:endParaRPr lang="en-US" sz="1400" dirty="0"/>
           </a:p>
@@ -3062,7 +3062,7 @@
                 <a:ea typeface="Calibri" pitchFamily="34" charset="-122"/>
                 <a:cs typeface="Calibri" pitchFamily="34" charset="-120"/>
               </a:rPr>
-              <a:t>Passed screens: 0</a:t>
+              <a:t>Passed screens: 2</a:t>
             </a:r>
             <a:endParaRPr lang="en-US" sz="1400" dirty="0"/>
           </a:p>

--- a/paper/presentation.pptx
+++ b/paper/presentation.pptx
@@ -3041,7 +3041,7 @@
                 <a:ea typeface="Calibri" pitchFamily="34" charset="-122"/>
                 <a:cs typeface="Calibri" pitchFamily="34" charset="-120"/>
               </a:rPr>
-              <a:t>Retrieved: 58</a:t>
+              <a:t>Retrieved: 165</a:t>
             </a:r>
             <a:endParaRPr lang="en-US" sz="1400" dirty="0"/>
           </a:p>
@@ -3062,7 +3062,7 @@
                 <a:ea typeface="Calibri" pitchFamily="34" charset="-122"/>
                 <a:cs typeface="Calibri" pitchFamily="34" charset="-120"/>
               </a:rPr>
-              <a:t>Passed screens: 2</a:t>
+              <a:t>Passed screens: 3</a:t>
             </a:r>
             <a:endParaRPr lang="en-US" sz="1400" dirty="0"/>
           </a:p>

--- a/paper/presentation.pptx
+++ b/paper/presentation.pptx
@@ -2982,7 +2982,7 @@
       </p:sp>
       <p:pic>
         <p:nvPicPr>
-          <p:cNvPr id="3" name="Image 0" descr="/home/runner/work/Modern-Labor-Market-Data-Submission/Modern-Labor-Market-Data-Submission/paper/figures/fig1_funnel.png">    </p:cNvPr>
+          <p:cNvPr id="3" name="Image 0" descr="/home/user/modern-labor-market-data-submission/paper/figures/fig1_funnel.png">    </p:cNvPr>
           <p:cNvPicPr>
             <a:picLocks noChangeAspect="1"/>
           </p:cNvPicPr>

--- a/paper/presentation.pptx
+++ b/paper/presentation.pptx
@@ -509,7 +509,7 @@
           <a:p>
             <a:r>
               <a:rPr lang="en-US" dirty="0"/>
-              <a:t>Current estimation sample: 0 postings with a disclosed pay range. The dependent variable is the log of the midpoint of the employer-stated range, annualized.</a:t>
+              <a:t>Current estimation sample: 35 postings with a disclosed pay range. The dependent variable is the log of the midpoint of the employer-stated range, annualized.</a:t>
             </a:r>
             <a:endParaRPr lang="en-US" dirty="0"/>
           </a:p>
@@ -3041,7 +3041,7 @@
                 <a:ea typeface="Calibri" pitchFamily="34" charset="-122"/>
                 <a:cs typeface="Calibri" pitchFamily="34" charset="-120"/>
               </a:rPr>
-              <a:t>Retrieved: 165</a:t>
+              <a:t>Retrieved: 686</a:t>
             </a:r>
             <a:endParaRPr lang="en-US" sz="1400" dirty="0"/>
           </a:p>
@@ -3062,7 +3062,7 @@
                 <a:ea typeface="Calibri" pitchFamily="34" charset="-122"/>
                 <a:cs typeface="Calibri" pitchFamily="34" charset="-120"/>
               </a:rPr>
-              <a:t>Passed screens: 3</a:t>
+              <a:t>Passed screens: 64</a:t>
             </a:r>
             <a:endParaRPr lang="en-US" sz="1400" dirty="0"/>
           </a:p>
@@ -3083,7 +3083,7 @@
                 <a:ea typeface="Calibri" pitchFamily="34" charset="-122"/>
                 <a:cs typeface="Calibri" pitchFamily="34" charset="-120"/>
               </a:rPr>
-              <a:t>In a study metro: 0</a:t>
+              <a:t>In a study metro: 43</a:t>
             </a:r>
             <a:endParaRPr lang="en-US" sz="1400" dirty="0"/>
           </a:p>
@@ -3104,7 +3104,7 @@
                 <a:ea typeface="Calibri" pitchFamily="34" charset="-122"/>
                 <a:cs typeface="Calibri" pitchFamily="34" charset="-120"/>
               </a:rPr>
-              <a:t>Unique postings: 0</a:t>
+              <a:t>Unique postings: 38</a:t>
             </a:r>
             <a:endParaRPr lang="en-US" sz="1400" dirty="0"/>
           </a:p>
@@ -3125,7 +3125,7 @@
                 <a:ea typeface="Calibri" pitchFamily="34" charset="-122"/>
                 <a:cs typeface="Calibri" pitchFamily="34" charset="-120"/>
               </a:rPr>
-              <a:t>Pay disclosed: 0</a:t>
+              <a:t>Pay disclosed: 35</a:t>
             </a:r>
             <a:endParaRPr lang="en-US" sz="1400" dirty="0"/>
           </a:p>
@@ -3252,12 +3252,12 @@
         </p:nvSpPr>
         <p:spPr>
           <a:xfrm>
-            <a:off x="640080" y="1463040"/>
-            <a:ext cx="10908792" cy="2011680"/>
+            <a:off x="640080" y="1234440"/>
+            <a:ext cx="3383280" cy="1691640"/>
           </a:xfrm>
           <a:prstGeom prst="roundRect">
             <a:avLst>
-              <a:gd name="adj" fmla="val 5455"/>
+              <a:gd name="adj" fmla="val 6486"/>
             </a:avLst>
           </a:prstGeom>
           <a:solidFill>
@@ -3279,8 +3279,8 @@
         </p:nvSpPr>
         <p:spPr>
           <a:xfrm>
-            <a:off x="1005840" y="1691640"/>
-            <a:ext cx="10177272" cy="685800"/>
+            <a:off x="822960" y="1435608"/>
+            <a:ext cx="3017520" cy="777240"/>
           </a:xfrm>
           <a:prstGeom prst="rect">
             <a:avLst/>
@@ -3292,21 +3292,21 @@
           <a:bodyPr wrap="square" lIns="0" tIns="0" rIns="0" bIns="0" rtlCol="0" anchor="ctr"/>
           <a:lstStyle/>
           <a:p>
-            <a:pPr indent="0" marL="0">
+            <a:pPr algn="ctr" indent="0" marL="0">
               <a:buNone/>
             </a:pPr>
             <a:r>
-              <a:rPr lang="en-US" sz="1800" b="1" dirty="0">
-                <a:solidFill>
-                  <a:srgbClr val="21295C"/>
-                </a:solidFill>
-                <a:latin typeface="Calibri" pitchFamily="34" charset="0"/>
-                <a:ea typeface="Calibri" pitchFamily="34" charset="-122"/>
-                <a:cs typeface="Calibri" pitchFamily="34" charset="-120"/>
-              </a:rPr>
-              <a:t>No results yet — the estimation sample is still below the threshold for a meaningful model.</a:t>
-            </a:r>
-            <a:endParaRPr lang="en-US" sz="1800" dirty="0"/>
+              <a:rPr lang="en-US" sz="4000" b="1" dirty="0">
+                <a:solidFill>
+                  <a:srgbClr val="065A82"/>
+                </a:solidFill>
+                <a:latin typeface="Calibri" pitchFamily="34" charset="0"/>
+                <a:ea typeface="Calibri" pitchFamily="34" charset="-122"/>
+                <a:cs typeface="Calibri" pitchFamily="34" charset="-120"/>
+              </a:rPr>
+              <a:t>$90,112</a:t>
+            </a:r>
+            <a:endParaRPr lang="en-US" sz="4000" dirty="0"/>
           </a:p>
         </p:txBody>
       </p:sp>
@@ -3318,8 +3318,8 @@
         </p:nvSpPr>
         <p:spPr>
           <a:xfrm>
-            <a:off x="1005840" y="2450592"/>
-            <a:ext cx="10177272" cy="914400"/>
+            <a:off x="822960" y="2258568"/>
+            <a:ext cx="3017520" cy="548640"/>
           </a:xfrm>
           <a:prstGeom prst="rect">
             <a:avLst/>
@@ -3331,14 +3331,11 @@
           <a:bodyPr wrap="square" lIns="0" tIns="0" rIns="0" bIns="0" rtlCol="0" anchor="ctr"/>
           <a:lstStyle/>
           <a:p>
-            <a:pPr indent="0" marL="0">
-              <a:lnSpc>
-                <a:spcPts val="2000"/>
-              </a:lnSpc>
+            <a:pPr algn="ctr" indent="0" marL="0">
               <a:buNone/>
             </a:pPr>
             <a:r>
-              <a:rPr lang="en-US" sz="1400" dirty="0">
+              <a:rPr lang="en-US" sz="1200" dirty="0">
                 <a:solidFill>
                   <a:srgbClr val="5A6672"/>
                 </a:solidFill>
@@ -3346,22 +3343,49 @@
                 <a:ea typeface="Calibri" pitchFamily="34" charset="-122"/>
                 <a:cs typeface="Calibri" pitchFamily="34" charset="-120"/>
               </a:rPr>
-              <a:t>Current sample: 0 postings with disclosed pay from 0 employers. Collection continues weekly; the model is estimated automatically once the sample supports it.</a:t>
-            </a:r>
-            <a:endParaRPr lang="en-US" sz="1400" dirty="0"/>
-          </a:p>
-        </p:txBody>
-      </p:sp>
-      <p:sp>
-        <p:nvSpPr>
-          <p:cNvPr id="6" name="Text 4"/>
+              <a:t>mean advertised pay</a:t>
+            </a:r>
+            <a:endParaRPr lang="en-US" sz="1200" dirty="0"/>
+          </a:p>
+        </p:txBody>
+      </p:sp>
+      <p:sp>
+        <p:nvSpPr>
+          <p:cNvPr id="6" name="Shape 4"/>
+          <p:cNvSpPr/>
+          <p:nvPr/>
+        </p:nvSpPr>
+        <p:spPr>
+          <a:xfrm>
+            <a:off x="4251960" y="1234440"/>
+            <a:ext cx="3383280" cy="1691640"/>
+          </a:xfrm>
+          <a:prstGeom prst="roundRect">
+            <a:avLst>
+              <a:gd name="adj" fmla="val 6486"/>
+            </a:avLst>
+          </a:prstGeom>
+          <a:solidFill>
+            <a:srgbClr val="F4F7F9"/>
+          </a:solidFill>
+          <a:ln w="12700">
+            <a:solidFill>
+              <a:srgbClr val="F4F7F9"/>
+            </a:solidFill>
+            <a:prstDash val="solid"/>
+          </a:ln>
+        </p:spPr>
+      </p:sp>
+      <p:sp>
+        <p:nvSpPr>
+          <p:cNvPr id="7" name="Text 5"/>
           <p:cNvSpPr txBox="1"/>
           <p:nvPr/>
         </p:nvSpPr>
         <p:spPr>
           <a:xfrm>
-            <a:off x="640080" y="3840480"/>
-            <a:ext cx="10908792" cy="2194560"/>
+            <a:off x="4434840" y="1435608"/>
+            <a:ext cx="3017520" cy="777240"/>
           </a:xfrm>
           <a:prstGeom prst="rect">
             <a:avLst/>
@@ -3370,82 +3394,195 @@
           <a:ln/>
         </p:spPr>
         <p:txBody>
-          <a:bodyPr wrap="square" rtlCol="0" anchor="ctr"/>
-          <a:lstStyle/>
-          <a:p>
-            <a:pPr marL="342900" indent="-342900">
-              <a:lnSpc>
-                <a:spcPts val="2200"/>
-              </a:lnSpc>
-              <a:spcAft>
-                <a:spcPts val="1000"/>
-              </a:spcAft>
-              <a:buSzPct val="100000"/>
-              <a:buChar char="•"/>
-            </a:pPr>
-            <a:r>
-              <a:rPr lang="en-US" sz="1500" dirty="0">
-                <a:solidFill>
-                  <a:srgbClr val="1A1A1A"/>
-                </a:solidFill>
-                <a:latin typeface="Calibri" pitchFamily="34" charset="0"/>
-                <a:ea typeface="Calibri" pitchFamily="34" charset="-122"/>
-                <a:cs typeface="Calibri" pitchFamily="34" charset="-120"/>
-              </a:rPr>
-              <a:t>The specification is pre-registered: a core model of 8-10 regressors, extended only when the sample supports ~20 observations per regressor</a:t>
-            </a:r>
-            <a:endParaRPr lang="en-US" sz="1500" dirty="0"/>
-          </a:p>
-          <a:p>
-            <a:pPr marL="342900" indent="-342900">
-              <a:lnSpc>
-                <a:spcPts val="2200"/>
-              </a:lnSpc>
-              <a:spcAft>
-                <a:spcPts val="1000"/>
-              </a:spcAft>
-              <a:buSzPct val="100000"/>
-              <a:buChar char="•"/>
-            </a:pPr>
-            <a:r>
-              <a:rPr lang="en-US" sz="1500" dirty="0">
-                <a:solidFill>
-                  <a:srgbClr val="1A1A1A"/>
-                </a:solidFill>
-                <a:latin typeface="Calibri" pitchFamily="34" charset="0"/>
-                <a:ea typeface="Calibri" pitchFamily="34" charset="-122"/>
-                <a:cs typeface="Calibri" pitchFamily="34" charset="-120"/>
-              </a:rPr>
-              <a:t>Choosing the specification from sample size rather than from results is what keeps the estimate honest</a:t>
-            </a:r>
-            <a:endParaRPr lang="en-US" sz="1500" dirty="0"/>
-          </a:p>
-          <a:p>
-            <a:pPr marL="342900" indent="-342900">
-              <a:lnSpc>
-                <a:spcPts val="2200"/>
-              </a:lnSpc>
-              <a:spcAft>
-                <a:spcPts val="1000"/>
-              </a:spcAft>
-              <a:buSzPct val="100000"/>
-              <a:buChar char="•"/>
-            </a:pPr>
-            <a:r>
-              <a:rPr lang="en-US" sz="1500" dirty="0">
-                <a:solidFill>
-                  <a:srgbClr val="1A1A1A"/>
-                </a:solidFill>
-                <a:latin typeface="Calibri" pitchFamily="34" charset="0"/>
-                <a:ea typeface="Calibri" pitchFamily="34" charset="-122"/>
-                <a:cs typeface="Calibri" pitchFamily="34" charset="-120"/>
-              </a:rPr>
-              <a:t>Standard errors are clustered by employer, since employers contribute many postings each</a:t>
-            </a:r>
-            <a:endParaRPr lang="en-US" sz="1500" dirty="0"/>
-          </a:p>
-        </p:txBody>
-      </p:sp>
+          <a:bodyPr wrap="square" lIns="0" tIns="0" rIns="0" bIns="0" rtlCol="0" anchor="ctr"/>
+          <a:lstStyle/>
+          <a:p>
+            <a:pPr algn="ctr" indent="0" marL="0">
+              <a:buNone/>
+            </a:pPr>
+            <a:r>
+              <a:rPr lang="en-US" sz="4000" b="1" dirty="0">
+                <a:solidFill>
+                  <a:srgbClr val="1C7293"/>
+                </a:solidFill>
+                <a:latin typeface="Calibri" pitchFamily="34" charset="0"/>
+                <a:ea typeface="Calibri" pitchFamily="34" charset="-122"/>
+                <a:cs typeface="Calibri" pitchFamily="34" charset="-120"/>
+              </a:rPr>
+              <a:t>35</a:t>
+            </a:r>
+            <a:endParaRPr lang="en-US" sz="4000" dirty="0"/>
+          </a:p>
+        </p:txBody>
+      </p:sp>
+      <p:sp>
+        <p:nvSpPr>
+          <p:cNvPr id="8" name="Text 6"/>
+          <p:cNvSpPr txBox="1"/>
+          <p:nvPr/>
+        </p:nvSpPr>
+        <p:spPr>
+          <a:xfrm>
+            <a:off x="4434840" y="2258568"/>
+            <a:ext cx="3017520" cy="548640"/>
+          </a:xfrm>
+          <a:prstGeom prst="rect">
+            <a:avLst/>
+          </a:prstGeom>
+          <a:noFill/>
+          <a:ln/>
+        </p:spPr>
+        <p:txBody>
+          <a:bodyPr wrap="square" lIns="0" tIns="0" rIns="0" bIns="0" rtlCol="0" anchor="ctr"/>
+          <a:lstStyle/>
+          <a:p>
+            <a:pPr algn="ctr" indent="0" marL="0">
+              <a:buNone/>
+            </a:pPr>
+            <a:r>
+              <a:rPr lang="en-US" sz="1200" dirty="0">
+                <a:solidFill>
+                  <a:srgbClr val="5A6672"/>
+                </a:solidFill>
+                <a:latin typeface="Calibri" pitchFamily="34" charset="0"/>
+                <a:ea typeface="Calibri" pitchFamily="34" charset="-122"/>
+                <a:cs typeface="Calibri" pitchFamily="34" charset="-120"/>
+              </a:rPr>
+              <a:t>postings in the model</a:t>
+            </a:r>
+            <a:endParaRPr lang="en-US" sz="1200" dirty="0"/>
+          </a:p>
+        </p:txBody>
+      </p:sp>
+      <p:sp>
+        <p:nvSpPr>
+          <p:cNvPr id="9" name="Shape 7"/>
+          <p:cNvSpPr/>
+          <p:nvPr/>
+        </p:nvSpPr>
+        <p:spPr>
+          <a:xfrm>
+            <a:off x="7863840" y="1234440"/>
+            <a:ext cx="3383280" cy="1691640"/>
+          </a:xfrm>
+          <a:prstGeom prst="roundRect">
+            <a:avLst>
+              <a:gd name="adj" fmla="val 6486"/>
+            </a:avLst>
+          </a:prstGeom>
+          <a:solidFill>
+            <a:srgbClr val="F4F7F9"/>
+          </a:solidFill>
+          <a:ln w="12700">
+            <a:solidFill>
+              <a:srgbClr val="F4F7F9"/>
+            </a:solidFill>
+            <a:prstDash val="solid"/>
+          </a:ln>
+        </p:spPr>
+      </p:sp>
+      <p:sp>
+        <p:nvSpPr>
+          <p:cNvPr id="10" name="Text 8"/>
+          <p:cNvSpPr txBox="1"/>
+          <p:nvPr/>
+        </p:nvSpPr>
+        <p:spPr>
+          <a:xfrm>
+            <a:off x="8046720" y="1435608"/>
+            <a:ext cx="3017520" cy="777240"/>
+          </a:xfrm>
+          <a:prstGeom prst="rect">
+            <a:avLst/>
+          </a:prstGeom>
+          <a:noFill/>
+          <a:ln/>
+        </p:spPr>
+        <p:txBody>
+          <a:bodyPr wrap="square" lIns="0" tIns="0" rIns="0" bIns="0" rtlCol="0" anchor="ctr"/>
+          <a:lstStyle/>
+          <a:p>
+            <a:pPr algn="ctr" indent="0" marL="0">
+              <a:buNone/>
+            </a:pPr>
+            <a:r>
+              <a:rPr lang="en-US" sz="4000" b="1" dirty="0">
+                <a:solidFill>
+                  <a:srgbClr val="21295C"/>
+                </a:solidFill>
+                <a:latin typeface="Calibri" pitchFamily="34" charset="0"/>
+                <a:ea typeface="Calibri" pitchFamily="34" charset="-122"/>
+                <a:cs typeface="Calibri" pitchFamily="34" charset="-120"/>
+              </a:rPr>
+              <a:t>0.71</a:t>
+            </a:r>
+            <a:endParaRPr lang="en-US" sz="4000" dirty="0"/>
+          </a:p>
+        </p:txBody>
+      </p:sp>
+      <p:sp>
+        <p:nvSpPr>
+          <p:cNvPr id="11" name="Text 9"/>
+          <p:cNvSpPr txBox="1"/>
+          <p:nvPr/>
+        </p:nvSpPr>
+        <p:spPr>
+          <a:xfrm>
+            <a:off x="8046720" y="2258568"/>
+            <a:ext cx="3017520" cy="548640"/>
+          </a:xfrm>
+          <a:prstGeom prst="rect">
+            <a:avLst/>
+          </a:prstGeom>
+          <a:noFill/>
+          <a:ln/>
+        </p:spPr>
+        <p:txBody>
+          <a:bodyPr wrap="square" lIns="0" tIns="0" rIns="0" bIns="0" rtlCol="0" anchor="ctr"/>
+          <a:lstStyle/>
+          <a:p>
+            <a:pPr algn="ctr" indent="0" marL="0">
+              <a:buNone/>
+            </a:pPr>
+            <a:r>
+              <a:rPr lang="en-US" sz="1200" dirty="0">
+                <a:solidFill>
+                  <a:srgbClr val="5A6672"/>
+                </a:solidFill>
+                <a:latin typeface="Calibri" pitchFamily="34" charset="0"/>
+                <a:ea typeface="Calibri" pitchFamily="34" charset="-122"/>
+                <a:cs typeface="Calibri" pitchFamily="34" charset="-120"/>
+              </a:rPr>
+              <a:t>R-squared</a:t>
+            </a:r>
+            <a:endParaRPr lang="en-US" sz="1200" dirty="0"/>
+          </a:p>
+        </p:txBody>
+      </p:sp>
+      <p:pic>
+        <p:nvPicPr>
+          <p:cNvPr id="12" name="Image 0" descr="/home/user/modern-labor-market-data-submission/paper/figures/fig3_coefficients.png">    </p:cNvPr>
+          <p:cNvPicPr>
+            <a:picLocks noChangeAspect="1"/>
+          </p:cNvPicPr>
+          <p:nvPr/>
+        </p:nvPicPr>
+        <p:blipFill>
+          <a:blip r:embed="rId1"/>
+          <a:stretch>
+            <a:fillRect/>
+          </a:stretch>
+        </p:blipFill>
+        <p:spPr>
+          <a:xfrm>
+            <a:off x="640080" y="3200400"/>
+            <a:ext cx="10881360" cy="3200400"/>
+          </a:xfrm>
+          <a:prstGeom prst="rect">
+            <a:avLst/>
+          </a:prstGeom>
+        </p:spPr>
+      </p:pic>
     </p:spTree>
   </p:cSld>
   <p:clrMapOvr>

--- a/paper/presentation.pptx
+++ b/paper/presentation.pptx
@@ -3041,7 +3041,7 @@
                 <a:ea typeface="Calibri" pitchFamily="34" charset="-122"/>
                 <a:cs typeface="Calibri" pitchFamily="34" charset="-120"/>
               </a:rPr>
-              <a:t>Retrieved: 686</a:t>
+              <a:t>Retrieved: 696</a:t>
             </a:r>
             <a:endParaRPr lang="en-US" sz="1400" dirty="0"/>
           </a:p>
@@ -3062,7 +3062,7 @@
                 <a:ea typeface="Calibri" pitchFamily="34" charset="-122"/>
                 <a:cs typeface="Calibri" pitchFamily="34" charset="-120"/>
               </a:rPr>
-              <a:t>Passed screens: 64</a:t>
+              <a:t>Passed screens: 72</a:t>
             </a:r>
             <a:endParaRPr lang="en-US" sz="1400" dirty="0"/>
           </a:p>

--- a/paper/presentation.pptx
+++ b/paper/presentation.pptx
@@ -509,7 +509,7 @@
           <a:p>
             <a:r>
               <a:rPr lang="en-US" dirty="0"/>
-              <a:t>Current estimation sample: 35 postings with a disclosed pay range. The dependent variable is the log of the midpoint of the employer-stated range, annualized.</a:t>
+              <a:t>Current estimation sample: 100 postings with a disclosed pay range. The dependent variable is the log of the midpoint of the employer-stated range, annualized.</a:t>
             </a:r>
             <a:endParaRPr lang="en-US" dirty="0"/>
           </a:p>
@@ -597,7 +597,7 @@
           <a:p>
             <a:r>
               <a:rPr lang="en-US" dirty="0"/>
-              <a:t>Scope is deliberately narrow: core operators only, software/data/analytics roles only.</a:t>
+              <a:t>Roles stay narrow — an energy-analytics core. Geography and seniority are what widened.</a:t>
             </a:r>
             <a:endParaRPr lang="en-US" dirty="0"/>
           </a:p>
@@ -1573,7 +1573,7 @@
                 <a:ea typeface="Cambria" pitchFamily="34" charset="-122"/>
                 <a:cs typeface="Cambria" pitchFamily="34" charset="-120"/>
               </a:rPr>
-              <a:t>Advertised Pay in Early-Career</a:t>
+              <a:t>Determinants of Advertised Pay</a:t>
             </a:r>
             <a:endParaRPr lang="en-US" sz="4000" dirty="0"/>
           </a:p>
@@ -1593,7 +1593,7 @@
                 <a:ea typeface="Cambria" pitchFamily="34" charset="-122"/>
                 <a:cs typeface="Cambria" pitchFamily="34" charset="-120"/>
               </a:rPr>
-              <a:t>Software and Data Roles</a:t>
+              <a:t>in the US Energy and Data Center Sector</a:t>
             </a:r>
             <a:endParaRPr lang="en-US" sz="4000" dirty="0"/>
           </a:p>
@@ -1635,7 +1635,7 @@
                 <a:ea typeface="Calibri" pitchFamily="34" charset="-122"/>
                 <a:cs typeface="Calibri" pitchFamily="34" charset="-120"/>
               </a:rPr>
-              <a:t>Utility and data center operators in the Chicago and Indianapolis metros</a:t>
+              <a:t>Evidence from employer-published job postings, nationwide</a:t>
             </a:r>
             <a:endParaRPr lang="en-US" sz="1600" dirty="0"/>
           </a:p>
@@ -1811,7 +1811,7 @@
                 <a:ea typeface="Calibri" pitchFamily="34" charset="-122"/>
                 <a:cs typeface="Calibri" pitchFamily="34" charset="-120"/>
               </a:rPr>
-              <a:t>Data center buildout is driving technical hiring across the utility sector</a:t>
+              <a:t>Data center buildout is driving technical and analytical hiring across the energy sector</a:t>
             </a:r>
             <a:endParaRPr lang="en-US" sz="1500" dirty="0"/>
           </a:p>
@@ -1835,7 +1835,7 @@
                 <a:ea typeface="Calibri" pitchFamily="34" charset="-122"/>
                 <a:cs typeface="Calibri" pitchFamily="34" charset="-120"/>
               </a:rPr>
-              <a:t>Both sectors compete for early-career software and data talent against national tech pay scales</a:t>
+              <a:t>Seniority and location enter as regressors, not sample filters — which is what makes the disclosure contrast estimable</a:t>
             </a:r>
             <a:endParaRPr lang="en-US" sz="1500" dirty="0"/>
           </a:p>
@@ -2054,7 +2054,7 @@
                 <a:ea typeface="Calibri" pitchFamily="34" charset="-122"/>
                 <a:cs typeface="Calibri" pitchFamily="34" charset="-120"/>
               </a:rPr>
-              <a:t>35 mi</a:t>
+              <a:t>16</a:t>
             </a:r>
             <a:endParaRPr lang="en-US" sz="4000" dirty="0"/>
           </a:p>
@@ -2093,7 +2093,7 @@
                 <a:ea typeface="Calibri" pitchFamily="34" charset="-122"/>
                 <a:cs typeface="Calibri" pitchFamily="34" charset="-120"/>
               </a:rPr>
-              <a:t>radius around each metro centroid</a:t>
+              <a:t>states mandating pay in the posting</a:t>
             </a:r>
             <a:endParaRPr lang="en-US" sz="1200" dirty="0"/>
           </a:p>
@@ -3041,7 +3041,7 @@
                 <a:ea typeface="Calibri" pitchFamily="34" charset="-122"/>
                 <a:cs typeface="Calibri" pitchFamily="34" charset="-120"/>
               </a:rPr>
-              <a:t>Retrieved: 696</a:t>
+              <a:t>Retrieved: 831</a:t>
             </a:r>
             <a:endParaRPr lang="en-US" sz="1400" dirty="0"/>
           </a:p>
@@ -3062,7 +3062,7 @@
                 <a:ea typeface="Calibri" pitchFamily="34" charset="-122"/>
                 <a:cs typeface="Calibri" pitchFamily="34" charset="-120"/>
               </a:rPr>
-              <a:t>Passed screens: 72</a:t>
+              <a:t>Passed screens: 193</a:t>
             </a:r>
             <a:endParaRPr lang="en-US" sz="1400" dirty="0"/>
           </a:p>
@@ -3083,7 +3083,7 @@
                 <a:ea typeface="Calibri" pitchFamily="34" charset="-122"/>
                 <a:cs typeface="Calibri" pitchFamily="34" charset="-120"/>
               </a:rPr>
-              <a:t>In a study metro: 43</a:t>
+              <a:t>In a study metro: 149</a:t>
             </a:r>
             <a:endParaRPr lang="en-US" sz="1400" dirty="0"/>
           </a:p>
@@ -3104,7 +3104,7 @@
                 <a:ea typeface="Calibri" pitchFamily="34" charset="-122"/>
                 <a:cs typeface="Calibri" pitchFamily="34" charset="-120"/>
               </a:rPr>
-              <a:t>Unique postings: 38</a:t>
+              <a:t>Unique postings: 138</a:t>
             </a:r>
             <a:endParaRPr lang="en-US" sz="1400" dirty="0"/>
           </a:p>
@@ -3125,7 +3125,7 @@
                 <a:ea typeface="Calibri" pitchFamily="34" charset="-122"/>
                 <a:cs typeface="Calibri" pitchFamily="34" charset="-120"/>
               </a:rPr>
-              <a:t>Pay disclosed: 35</a:t>
+              <a:t>Pay disclosed: 100</a:t>
             </a:r>
             <a:endParaRPr lang="en-US" sz="1400" dirty="0"/>
           </a:p>
@@ -3304,7 +3304,7 @@
                 <a:ea typeface="Calibri" pitchFamily="34" charset="-122"/>
                 <a:cs typeface="Calibri" pitchFamily="34" charset="-120"/>
               </a:rPr>
-              <a:t>$90,112</a:t>
+              <a:t>$107,913</a:t>
             </a:r>
             <a:endParaRPr lang="en-US" sz="4000" dirty="0"/>
           </a:p>
@@ -3409,7 +3409,7 @@
                 <a:ea typeface="Calibri" pitchFamily="34" charset="-122"/>
                 <a:cs typeface="Calibri" pitchFamily="34" charset="-120"/>
               </a:rPr>
-              <a:t>35</a:t>
+              <a:t>100</a:t>
             </a:r>
             <a:endParaRPr lang="en-US" sz="4000" dirty="0"/>
           </a:p>
@@ -3514,7 +3514,7 @@
                 <a:ea typeface="Calibri" pitchFamily="34" charset="-122"/>
                 <a:cs typeface="Calibri" pitchFamily="34" charset="-120"/>
               </a:rPr>
-              <a:t>0.71</a:t>
+              <a:t>0.57</a:t>
             </a:r>
             <a:endParaRPr lang="en-US" sz="4000" dirty="0"/>
           </a:p>
@@ -3966,7 +3966,7 @@
                 <a:ea typeface="Calibri" pitchFamily="34" charset="-122"/>
                 <a:cs typeface="Calibri" pitchFamily="34" charset="-120"/>
               </a:rPr>
-              <a:t>They run iCIMS, which has no free public API — the largest Chicago utility employer is absent.</a:t>
+              <a:t>They run iCIMS: its feed goes only to approved job boards, its API is partner-gated, no syndication feed exists, and its terms bar automated access. Verified by reading them, not assumed.</a:t>
             </a:r>
             <a:endParaRPr lang="en-US" sz="1300" dirty="0"/>
           </a:p>

--- a/paper/presentation.pptx
+++ b/paper/presentation.pptx
@@ -509,7 +509,7 @@
           <a:p>
             <a:r>
               <a:rPr lang="en-US" dirty="0"/>
-              <a:t>Current estimation sample: 100 postings with a disclosed pay range. The dependent variable is the log of the midpoint of the employer-stated range, annualized.</a:t>
+              <a:t>Current estimation sample: 103 postings with a disclosed pay range. The dependent variable is the log of the midpoint of the employer-stated range, annualized.</a:t>
             </a:r>
             <a:endParaRPr lang="en-US" dirty="0"/>
           </a:p>
@@ -3041,7 +3041,7 @@
                 <a:ea typeface="Calibri" pitchFamily="34" charset="-122"/>
                 <a:cs typeface="Calibri" pitchFamily="34" charset="-120"/>
               </a:rPr>
-              <a:t>Retrieved: 831</a:t>
+              <a:t>Retrieved: 835</a:t>
             </a:r>
             <a:endParaRPr lang="en-US" sz="1400" dirty="0"/>
           </a:p>
@@ -3062,7 +3062,7 @@
                 <a:ea typeface="Calibri" pitchFamily="34" charset="-122"/>
                 <a:cs typeface="Calibri" pitchFamily="34" charset="-120"/>
               </a:rPr>
-              <a:t>Passed screens: 193</a:t>
+              <a:t>Passed screens: 200</a:t>
             </a:r>
             <a:endParaRPr lang="en-US" sz="1400" dirty="0"/>
           </a:p>
@@ -3083,7 +3083,7 @@
                 <a:ea typeface="Calibri" pitchFamily="34" charset="-122"/>
                 <a:cs typeface="Calibri" pitchFamily="34" charset="-120"/>
               </a:rPr>
-              <a:t>In a study metro: 149</a:t>
+              <a:t>In a study metro: 156</a:t>
             </a:r>
             <a:endParaRPr lang="en-US" sz="1400" dirty="0"/>
           </a:p>
@@ -3104,7 +3104,7 @@
                 <a:ea typeface="Calibri" pitchFamily="34" charset="-122"/>
                 <a:cs typeface="Calibri" pitchFamily="34" charset="-120"/>
               </a:rPr>
-              <a:t>Unique postings: 138</a:t>
+              <a:t>Unique postings: 141</a:t>
             </a:r>
             <a:endParaRPr lang="en-US" sz="1400" dirty="0"/>
           </a:p>
@@ -3125,7 +3125,7 @@
                 <a:ea typeface="Calibri" pitchFamily="34" charset="-122"/>
                 <a:cs typeface="Calibri" pitchFamily="34" charset="-120"/>
               </a:rPr>
-              <a:t>Pay disclosed: 100</a:t>
+              <a:t>Pay disclosed: 103</a:t>
             </a:r>
             <a:endParaRPr lang="en-US" sz="1400" dirty="0"/>
           </a:p>
@@ -3304,7 +3304,7 @@
                 <a:ea typeface="Calibri" pitchFamily="34" charset="-122"/>
                 <a:cs typeface="Calibri" pitchFamily="34" charset="-120"/>
               </a:rPr>
-              <a:t>$107,913</a:t>
+              <a:t>$107,561</a:t>
             </a:r>
             <a:endParaRPr lang="en-US" sz="4000" dirty="0"/>
           </a:p>
@@ -3409,7 +3409,7 @@
                 <a:ea typeface="Calibri" pitchFamily="34" charset="-122"/>
                 <a:cs typeface="Calibri" pitchFamily="34" charset="-120"/>
               </a:rPr>
-              <a:t>100</a:t>
+              <a:t>103</a:t>
             </a:r>
             <a:endParaRPr lang="en-US" sz="4000" dirty="0"/>
           </a:p>
@@ -3514,7 +3514,7 @@
                 <a:ea typeface="Calibri" pitchFamily="34" charset="-122"/>
                 <a:cs typeface="Calibri" pitchFamily="34" charset="-120"/>
               </a:rPr>
-              <a:t>0.57</a:t>
+              <a:t>0.54</a:t>
             </a:r>
             <a:endParaRPr lang="en-US" sz="4000" dirty="0"/>
           </a:p>

--- a/paper/presentation.pptx
+++ b/paper/presentation.pptx
@@ -509,7 +509,7 @@
           <a:p>
             <a:r>
               <a:rPr lang="en-US" dirty="0"/>
-              <a:t>Current estimation sample: 103 postings with a disclosed pay range. The dependent variable is the log of the midpoint of the employer-stated range, annualized.</a:t>
+              <a:t>Current estimation sample: 137 postings with a disclosed pay range. The dependent variable is the log of the midpoint of the employer-stated range, annualized.</a:t>
             </a:r>
             <a:endParaRPr lang="en-US" dirty="0"/>
           </a:p>
@@ -3041,7 +3041,7 @@
                 <a:ea typeface="Calibri" pitchFamily="34" charset="-122"/>
                 <a:cs typeface="Calibri" pitchFamily="34" charset="-120"/>
               </a:rPr>
-              <a:t>Retrieved: 835</a:t>
+              <a:t>Retrieved: 897</a:t>
             </a:r>
             <a:endParaRPr lang="en-US" sz="1400" dirty="0"/>
           </a:p>
@@ -3062,7 +3062,7 @@
                 <a:ea typeface="Calibri" pitchFamily="34" charset="-122"/>
                 <a:cs typeface="Calibri" pitchFamily="34" charset="-120"/>
               </a:rPr>
-              <a:t>Passed screens: 200</a:t>
+              <a:t>Passed screens: 269</a:t>
             </a:r>
             <a:endParaRPr lang="en-US" sz="1400" dirty="0"/>
           </a:p>
@@ -3083,7 +3083,7 @@
                 <a:ea typeface="Calibri" pitchFamily="34" charset="-122"/>
                 <a:cs typeface="Calibri" pitchFamily="34" charset="-120"/>
               </a:rPr>
-              <a:t>In a study metro: 156</a:t>
+              <a:t>In a study metro: 223</a:t>
             </a:r>
             <a:endParaRPr lang="en-US" sz="1400" dirty="0"/>
           </a:p>
@@ -3104,7 +3104,7 @@
                 <a:ea typeface="Calibri" pitchFamily="34" charset="-122"/>
                 <a:cs typeface="Calibri" pitchFamily="34" charset="-120"/>
               </a:rPr>
-              <a:t>Unique postings: 141</a:t>
+              <a:t>Unique postings: 204</a:t>
             </a:r>
             <a:endParaRPr lang="en-US" sz="1400" dirty="0"/>
           </a:p>
@@ -3125,7 +3125,7 @@
                 <a:ea typeface="Calibri" pitchFamily="34" charset="-122"/>
                 <a:cs typeface="Calibri" pitchFamily="34" charset="-120"/>
               </a:rPr>
-              <a:t>Pay disclosed: 103</a:t>
+              <a:t>Pay disclosed: 137</a:t>
             </a:r>
             <a:endParaRPr lang="en-US" sz="1400" dirty="0"/>
           </a:p>
@@ -3304,7 +3304,7 @@
                 <a:ea typeface="Calibri" pitchFamily="34" charset="-122"/>
                 <a:cs typeface="Calibri" pitchFamily="34" charset="-120"/>
               </a:rPr>
-              <a:t>$107,561</a:t>
+              <a:t>$113,236</a:t>
             </a:r>
             <a:endParaRPr lang="en-US" sz="4000" dirty="0"/>
           </a:p>
@@ -3409,7 +3409,7 @@
                 <a:ea typeface="Calibri" pitchFamily="34" charset="-122"/>
                 <a:cs typeface="Calibri" pitchFamily="34" charset="-120"/>
               </a:rPr>
-              <a:t>103</a:t>
+              <a:t>137</a:t>
             </a:r>
             <a:endParaRPr lang="en-US" sz="4000" dirty="0"/>
           </a:p>
@@ -3514,7 +3514,7 @@
                 <a:ea typeface="Calibri" pitchFamily="34" charset="-122"/>
                 <a:cs typeface="Calibri" pitchFamily="34" charset="-120"/>
               </a:rPr>
-              <a:t>0.54</a:t>
+              <a:t>0.52</a:t>
             </a:r>
             <a:endParaRPr lang="en-US" sz="4000" dirty="0"/>
           </a:p>

--- a/paper/presentation.pptx
+++ b/paper/presentation.pptx
@@ -3041,7 +3041,7 @@
                 <a:ea typeface="Calibri" pitchFamily="34" charset="-122"/>
                 <a:cs typeface="Calibri" pitchFamily="34" charset="-120"/>
               </a:rPr>
-              <a:t>Retrieved: 897</a:t>
+              <a:t>Retrieved: 898</a:t>
             </a:r>
             <a:endParaRPr lang="en-US" sz="1400" dirty="0"/>
           </a:p>
@@ -3062,7 +3062,7 @@
                 <a:ea typeface="Calibri" pitchFamily="34" charset="-122"/>
                 <a:cs typeface="Calibri" pitchFamily="34" charset="-120"/>
               </a:rPr>
-              <a:t>Passed screens: 269</a:t>
+              <a:t>Passed screens: 268</a:t>
             </a:r>
             <a:endParaRPr lang="en-US" sz="1400" dirty="0"/>
           </a:p>
@@ -3083,7 +3083,7 @@
                 <a:ea typeface="Calibri" pitchFamily="34" charset="-122"/>
                 <a:cs typeface="Calibri" pitchFamily="34" charset="-120"/>
               </a:rPr>
-              <a:t>In a study metro: 223</a:t>
+              <a:t>In a study metro: 222</a:t>
             </a:r>
             <a:endParaRPr lang="en-US" sz="1400" dirty="0"/>
           </a:p>
@@ -3304,7 +3304,7 @@
                 <a:ea typeface="Calibri" pitchFamily="34" charset="-122"/>
                 <a:cs typeface="Calibri" pitchFamily="34" charset="-120"/>
               </a:rPr>
-              <a:t>$113,236</a:t>
+              <a:t>$113,864</a:t>
             </a:r>
             <a:endParaRPr lang="en-US" sz="4000" dirty="0"/>
           </a:p>

--- a/paper/presentation.pptx
+++ b/paper/presentation.pptx
@@ -4178,7 +4178,7 @@
                 <a:ea typeface="Calibri" pitchFamily="34" charset="-122"/>
                 <a:cs typeface="Calibri" pitchFamily="34" charset="-120"/>
               </a:rPr>
-              <a:t>Clustered standard errors under-covered at 88% in simulation with 12 clusters.</a:t>
+              <a:t>Clustered errors cover at 92% against a nominal 95%. Significance is read off a wild cluster bootstrap, which leaves only seniority and the ML/AI skill premium standing.</a:t>
             </a:r>
             <a:endParaRPr lang="en-US" sz="1300" dirty="0"/>
           </a:p>

--- a/paper/presentation.pptx
+++ b/paper/presentation.pptx
@@ -509,7 +509,7 @@
           <a:p>
             <a:r>
               <a:rPr lang="en-US" dirty="0"/>
-              <a:t>Current estimation sample: 137 postings with a disclosed pay range. The dependent variable is the log of the midpoint of the employer-stated range, annualized.</a:t>
+              <a:t>Current estimation sample: 120 postings with a disclosed pay range. The dependent variable is the log of the midpoint of the employer-stated range, annualized.</a:t>
             </a:r>
             <a:endParaRPr lang="en-US" dirty="0"/>
           </a:p>
@@ -3041,7 +3041,7 @@
                 <a:ea typeface="Calibri" pitchFamily="34" charset="-122"/>
                 <a:cs typeface="Calibri" pitchFamily="34" charset="-120"/>
               </a:rPr>
-              <a:t>Retrieved: 898</a:t>
+              <a:t>Retrieved: 1716</a:t>
             </a:r>
             <a:endParaRPr lang="en-US" sz="1400" dirty="0"/>
           </a:p>
@@ -3062,7 +3062,7 @@
                 <a:ea typeface="Calibri" pitchFamily="34" charset="-122"/>
                 <a:cs typeface="Calibri" pitchFamily="34" charset="-120"/>
               </a:rPr>
-              <a:t>Passed screens: 268</a:t>
+              <a:t>Passed screens: 389</a:t>
             </a:r>
             <a:endParaRPr lang="en-US" sz="1400" dirty="0"/>
           </a:p>
@@ -3083,7 +3083,7 @@
                 <a:ea typeface="Calibri" pitchFamily="34" charset="-122"/>
                 <a:cs typeface="Calibri" pitchFamily="34" charset="-120"/>
               </a:rPr>
-              <a:t>In a study metro: 222</a:t>
+              <a:t>In a study metro: 307</a:t>
             </a:r>
             <a:endParaRPr lang="en-US" sz="1400" dirty="0"/>
           </a:p>
@@ -3104,7 +3104,7 @@
                 <a:ea typeface="Calibri" pitchFamily="34" charset="-122"/>
                 <a:cs typeface="Calibri" pitchFamily="34" charset="-120"/>
               </a:rPr>
-              <a:t>Unique postings: 204</a:t>
+              <a:t>Unique postings: 156</a:t>
             </a:r>
             <a:endParaRPr lang="en-US" sz="1400" dirty="0"/>
           </a:p>
@@ -3125,7 +3125,7 @@
                 <a:ea typeface="Calibri" pitchFamily="34" charset="-122"/>
                 <a:cs typeface="Calibri" pitchFamily="34" charset="-120"/>
               </a:rPr>
-              <a:t>Pay disclosed: 137</a:t>
+              <a:t>Pay disclosed: 120</a:t>
             </a:r>
             <a:endParaRPr lang="en-US" sz="1400" dirty="0"/>
           </a:p>
@@ -3304,7 +3304,7 @@
                 <a:ea typeface="Calibri" pitchFamily="34" charset="-122"/>
                 <a:cs typeface="Calibri" pitchFamily="34" charset="-120"/>
               </a:rPr>
-              <a:t>$113,864</a:t>
+              <a:t>$109,489</a:t>
             </a:r>
             <a:endParaRPr lang="en-US" sz="4000" dirty="0"/>
           </a:p>
@@ -3409,7 +3409,7 @@
                 <a:ea typeface="Calibri" pitchFamily="34" charset="-122"/>
                 <a:cs typeface="Calibri" pitchFamily="34" charset="-120"/>
               </a:rPr>
-              <a:t>137</a:t>
+              <a:t>120</a:t>
             </a:r>
             <a:endParaRPr lang="en-US" sz="4000" dirty="0"/>
           </a:p>
@@ -3514,7 +3514,7 @@
                 <a:ea typeface="Calibri" pitchFamily="34" charset="-122"/>
                 <a:cs typeface="Calibri" pitchFamily="34" charset="-120"/>
               </a:rPr>
-              <a:t>0.52</a:t>
+              <a:t>0.55</a:t>
             </a:r>
             <a:endParaRPr lang="en-US" sz="4000" dirty="0"/>
           </a:p>

--- a/paper/presentation.pptx
+++ b/paper/presentation.pptx
@@ -773,7 +773,7 @@
           <a:p>
             <a:r>
               <a:rPr lang="en-US" dirty="0"/>
-              <a:t>This asymmetry is the study's main source of disclosure variation and its main threat to the metro comparison.</a:t>
+              <a:t>Illinois HB 3129 was the original motivation; the study is national now and the contrast spans 16 jurisdictions.</a:t>
             </a:r>
             <a:endParaRPr lang="en-US" dirty="0"/>
           </a:p>
@@ -2446,7 +2446,7 @@
                 <a:ea typeface="Cambria" pitchFamily="34" charset="-122"/>
                 <a:cs typeface="Cambria" pitchFamily="34" charset="-120"/>
               </a:rPr>
-              <a:t>Why Illinois makes this possible</a:t>
+              <a:t>Why pay-transparency mandates make this possible</a:t>
             </a:r>
             <a:endParaRPr lang="en-US" sz="3200" dirty="0"/>
           </a:p>
@@ -2512,7 +2512,7 @@
                 <a:ea typeface="Calibri" pitchFamily="34" charset="-122"/>
                 <a:cs typeface="Calibri" pitchFamily="34" charset="-120"/>
               </a:rPr>
-              <a:t>HB 3129</a:t>
+              <a:t>16</a:t>
             </a:r>
             <a:endParaRPr lang="en-US" sz="4000" dirty="0"/>
           </a:p>
@@ -2551,7 +2551,7 @@
                 <a:ea typeface="Calibri" pitchFamily="34" charset="-122"/>
                 <a:cs typeface="Calibri" pitchFamily="34" charset="-120"/>
               </a:rPr>
-              <a:t>effective 1 Jan 2025</a:t>
+              <a:t>US jurisdictions requiring a pay scale</a:t>
             </a:r>
             <a:endParaRPr lang="en-US" sz="1200" dirty="0"/>
           </a:p>
@@ -2617,7 +2617,7 @@
                 <a:ea typeface="Calibri" pitchFamily="34" charset="-122"/>
                 <a:cs typeface="Calibri" pitchFamily="34" charset="-120"/>
               </a:rPr>
-              <a:t>15+</a:t>
+              <a:t>98%</a:t>
             </a:r>
             <a:endParaRPr lang="en-US" sz="4000" dirty="0"/>
           </a:p>
@@ -2656,7 +2656,7 @@
                 <a:ea typeface="Calibri" pitchFamily="34" charset="-122"/>
                 <a:cs typeface="Calibri" pitchFamily="34" charset="-120"/>
               </a:rPr>
-              <a:t>employees covered</a:t>
+              <a:t>disclose (n=100)</a:t>
             </a:r>
             <a:endParaRPr lang="en-US" sz="1200" dirty="0"/>
           </a:p>
@@ -2722,7 +2722,7 @@
                 <a:ea typeface="Calibri" pitchFamily="34" charset="-122"/>
                 <a:cs typeface="Calibri" pitchFamily="34" charset="-120"/>
               </a:rPr>
-              <a:t>IN: none</a:t>
+              <a:t>39%</a:t>
             </a:r>
             <a:endParaRPr lang="en-US" sz="4000" dirty="0"/>
           </a:p>
@@ -2761,7 +2761,7 @@
                 <a:ea typeface="Calibri" pitchFamily="34" charset="-122"/>
                 <a:cs typeface="Calibri" pitchFamily="34" charset="-120"/>
               </a:rPr>
-              <a:t>no Indiana mandate</a:t>
+              <a:t>disclose without one (n=56)</a:t>
             </a:r>
             <a:endParaRPr lang="en-US" sz="1200" dirty="0"/>
           </a:p>
@@ -2807,7 +2807,7 @@
                 <a:ea typeface="Calibri" pitchFamily="34" charset="-122"/>
                 <a:cs typeface="Calibri" pitchFamily="34" charset="-120"/>
               </a:rPr>
-              <a:t>Illinois employers must state the pay scale AND describe benefits in any posting for Illinois work</a:t>
+              <a:t>Where a mandate applies, the employer must state a pay scale in the posting itself — so the dependent variable is legally required to appear</a:t>
             </a:r>
             <a:endParaRPr lang="en-US" sz="1500" dirty="0"/>
           </a:p>
@@ -2831,7 +2831,7 @@
                 <a:ea typeface="Calibri" pitchFamily="34" charset="-122"/>
                 <a:cs typeface="Calibri" pitchFamily="34" charset="-120"/>
               </a:rPr>
-              <a:t>The dependent variable and several benefit regressors are therefore legally required to appear</a:t>
+              <a:t>Coverage attaches to the JOB's location, so a posting listing any covered place is covered</a:t>
             </a:r>
             <a:endParaRPr lang="en-US" sz="1500" dirty="0"/>
           </a:p>
@@ -2855,7 +2855,7 @@
                 <a:ea typeface="Calibri" pitchFamily="34" charset="-122"/>
                 <a:cs typeface="Calibri" pitchFamily="34" charset="-120"/>
               </a:rPr>
-              <a:t>Indiana has no comparable law, so Indianapolis postings disclose far less often</a:t>
+              <a:t>That asymmetry is what makes the disclosure contrast estimable at all, and it is the study's clearest result</a:t>
             </a:r>
             <a:endParaRPr lang="en-US" sz="1500" dirty="0"/>
           </a:p>
@@ -2879,7 +2879,7 @@
                 <a:ea typeface="Calibri" pitchFamily="34" charset="-122"/>
                 <a:cs typeface="Calibri" pitchFamily="34" charset="-120"/>
               </a:rPr>
-              <a:t>Those that do disclose are self-selected — the metro comparison carries that caveat explicitly</a:t>
+              <a:t>mandate_state is carried as a regressor, so the contrast is examined rather than assumed away</a:t>
             </a:r>
             <a:endParaRPr lang="en-US" sz="1500" dirty="0"/>
           </a:p>
@@ -2903,7 +2903,7 @@
                 <a:ea typeface="Calibri" pitchFamily="34" charset="-122"/>
                 <a:cs typeface="Calibri" pitchFamily="34" charset="-120"/>
               </a:rPr>
-              <a:t>mandate_state is carried as a regressor so the contrast can be examined, not assumed away</a:t>
+              <a:t>It is associational: one cross-section, no time variation, no difference-in-differences available</a:t>
             </a:r>
             <a:endParaRPr lang="en-US" sz="1500" dirty="0"/>
           </a:p>
@@ -3304,7 +3304,7 @@
                 <a:ea typeface="Calibri" pitchFamily="34" charset="-122"/>
                 <a:cs typeface="Calibri" pitchFamily="34" charset="-120"/>
               </a:rPr>
-              <a:t>$109,489</a:t>
+              <a:t>57–61pp</a:t>
             </a:r>
             <a:endParaRPr lang="en-US" sz="4000" dirty="0"/>
           </a:p>
@@ -3343,7 +3343,7 @@
                 <a:ea typeface="Calibri" pitchFamily="34" charset="-122"/>
                 <a:cs typeface="Calibri" pitchFamily="34" charset="-120"/>
               </a:rPr>
-              <a:t>mean advertised pay</a:t>
+              <a:t>disclosure gap, every cut of the sample</a:t>
             </a:r>
             <a:endParaRPr lang="en-US" sz="1200" dirty="0"/>
           </a:p>
@@ -3448,7 +3448,7 @@
                 <a:ea typeface="Calibri" pitchFamily="34" charset="-122"/>
                 <a:cs typeface="Calibri" pitchFamily="34" charset="-120"/>
               </a:rPr>
-              <a:t>postings in the model</a:t>
+              <a:t>postings, 25 employers</a:t>
             </a:r>
             <a:endParaRPr lang="en-US" sz="1200" dirty="0"/>
           </a:p>
@@ -3514,7 +3514,7 @@
                 <a:ea typeface="Calibri" pitchFamily="34" charset="-122"/>
                 <a:cs typeface="Calibri" pitchFamily="34" charset="-120"/>
               </a:rPr>
-              <a:t>0.55</a:t>
+              <a:t>2</a:t>
             </a:r>
             <a:endParaRPr lang="en-US" sz="4000" dirty="0"/>
           </a:p>
@@ -3553,36 +3553,130 @@
                 <a:ea typeface="Calibri" pitchFamily="34" charset="-122"/>
                 <a:cs typeface="Calibri" pitchFamily="34" charset="-120"/>
               </a:rPr>
-              <a:t>R-squared</a:t>
+              <a:t>predictors surviving the bootstrap</a:t>
             </a:r>
             <a:endParaRPr lang="en-US" sz="1200" dirty="0"/>
           </a:p>
         </p:txBody>
       </p:sp>
-      <p:pic>
-        <p:nvPicPr>
-          <p:cNvPr id="12" name="Image 0" descr="/home/user/modern-labor-market-data-submission/paper/figures/fig3_coefficients.png">    </p:cNvPr>
-          <p:cNvPicPr>
-            <a:picLocks noChangeAspect="1"/>
-          </p:cNvPicPr>
-          <p:nvPr/>
-        </p:nvPicPr>
-        <p:blipFill>
-          <a:blip r:embed="rId1"/>
-          <a:stretch>
-            <a:fillRect/>
-          </a:stretch>
-        </p:blipFill>
-        <p:spPr>
-          <a:xfrm>
-            <a:off x="640080" y="3200400"/>
-            <a:ext cx="10881360" cy="3200400"/>
-          </a:xfrm>
-          <a:prstGeom prst="rect">
-            <a:avLst/>
-          </a:prstGeom>
-        </p:spPr>
-      </p:pic>
+      <p:sp>
+        <p:nvSpPr>
+          <p:cNvPr id="12" name="Text 10"/>
+          <p:cNvSpPr txBox="1"/>
+          <p:nvPr/>
+        </p:nvSpPr>
+        <p:spPr>
+          <a:xfrm>
+            <a:off x="640080" y="3108960"/>
+            <a:ext cx="10908792" cy="2377440"/>
+          </a:xfrm>
+          <a:prstGeom prst="rect">
+            <a:avLst/>
+          </a:prstGeom>
+          <a:noFill/>
+          <a:ln/>
+        </p:spPr>
+        <p:txBody>
+          <a:bodyPr wrap="square" rtlCol="0" anchor="ctr"/>
+          <a:lstStyle/>
+          <a:p>
+            <a:pPr marL="342900" indent="-342900">
+              <a:lnSpc>
+                <a:spcPts val="2200"/>
+              </a:lnSpc>
+              <a:spcAft>
+                <a:spcPts val="1000"/>
+              </a:spcAft>
+              <a:buSzPct val="100000"/>
+              <a:buChar char="•"/>
+            </a:pPr>
+            <a:r>
+              <a:rPr lang="en-US" sz="1500" dirty="0">
+                <a:solidFill>
+                  <a:srgbClr val="1A1A1A"/>
+                </a:solidFill>
+                <a:latin typeface="Calibri" pitchFamily="34" charset="0"/>
+                <a:ea typeface="Calibri" pitchFamily="34" charset="-122"/>
+                <a:cs typeface="Calibri" pitchFamily="34" charset="-120"/>
+              </a:rPr>
+              <a:t>Pay is stated far more often where a mandate applies, and the gap is stable across every cut — this is the result the study stands behind</a:t>
+            </a:r>
+            <a:endParaRPr lang="en-US" sz="1500" dirty="0"/>
+          </a:p>
+          <a:p>
+            <a:pPr marL="342900" indent="-342900">
+              <a:lnSpc>
+                <a:spcPts val="2200"/>
+              </a:lnSpc>
+              <a:spcAft>
+                <a:spcPts val="1000"/>
+              </a:spcAft>
+              <a:buSzPct val="100000"/>
+              <a:buChar char="•"/>
+            </a:pPr>
+            <a:r>
+              <a:rPr lang="en-US" sz="1500" dirty="0">
+                <a:solidFill>
+                  <a:srgbClr val="1A1A1A"/>
+                </a:solidFill>
+                <a:latin typeface="Calibri" pitchFamily="34" charset="0"/>
+                <a:ea typeface="Calibri" pitchFamily="34" charset="-122"/>
+                <a:cs typeface="Calibri" pitchFamily="34" charset="-120"/>
+              </a:rPr>
+              <a:t>Within disclosed pay, a South location, seniority are the only attributes distinguishable from zero</a:t>
+            </a:r>
+            <a:endParaRPr lang="en-US" sz="1500" dirty="0"/>
+          </a:p>
+          <a:p>
+            <a:pPr marL="342900" indent="-342900">
+              <a:lnSpc>
+                <a:spcPts val="2200"/>
+              </a:lnSpc>
+              <a:spcAft>
+                <a:spcPts val="1000"/>
+              </a:spcAft>
+              <a:buSzPct val="100000"/>
+              <a:buChar char="•"/>
+            </a:pPr>
+            <a:r>
+              <a:rPr lang="en-US" sz="1500" dirty="0">
+                <a:solidFill>
+                  <a:srgbClr val="1A1A1A"/>
+                </a:solidFill>
+                <a:latin typeface="Calibri" pitchFamily="34" charset="0"/>
+                <a:ea typeface="Calibri" pitchFamily="34" charset="-122"/>
+                <a:cs typeface="Calibri" pitchFamily="34" charset="-120"/>
+              </a:rPr>
+              <a:t>3 coefficients reach significance under clustered standard errors and do NOT survive the wild cluster bootstrap — reported as inconclusive, not as findings</a:t>
+            </a:r>
+            <a:endParaRPr lang="en-US" sz="1500" dirty="0"/>
+          </a:p>
+          <a:p>
+            <a:pPr marL="342900" indent="-342900">
+              <a:lnSpc>
+                <a:spcPts val="2200"/>
+              </a:lnSpc>
+              <a:spcAft>
+                <a:spcPts val="1000"/>
+              </a:spcAft>
+              <a:buSzPct val="100000"/>
+              <a:buChar char="•"/>
+            </a:pPr>
+            <a:r>
+              <a:rPr lang="en-US" sz="1500" dirty="0">
+                <a:solidFill>
+                  <a:srgbClr val="1A1A1A"/>
+                </a:solidFill>
+                <a:latin typeface="Calibri" pitchFamily="34" charset="0"/>
+                <a:ea typeface="Calibri" pitchFamily="34" charset="-122"/>
+                <a:cs typeface="Calibri" pitchFamily="34" charset="-120"/>
+              </a:rPr>
+              <a:t>Seniority was predicted to dominate and does; it also survives every robustness cut applied</a:t>
+            </a:r>
+            <a:endParaRPr lang="en-US" sz="1500" dirty="0"/>
+          </a:p>
+        </p:txBody>
+      </p:sp>
     </p:spTree>
   </p:cSld>
   <p:clrMapOvr>
@@ -3860,7 +3954,7 @@
                 <a:ea typeface="Calibri" pitchFamily="34" charset="-122"/>
                 <a:cs typeface="Calibri" pitchFamily="34" charset="-120"/>
               </a:rPr>
-              <a:t>Indiana has no mandate, so its disclosing postings are self-selected.</a:t>
+              <a:t>Outside mandate jurisdictions most postings state no pay, so every pay coefficient is conditional on disclosure. This is the central threat.</a:t>
             </a:r>
             <a:endParaRPr lang="en-US" sz="1300" dirty="0"/>
           </a:p>
@@ -4178,7 +4272,7 @@
                 <a:ea typeface="Calibri" pitchFamily="34" charset="-122"/>
                 <a:cs typeface="Calibri" pitchFamily="34" charset="-120"/>
               </a:rPr>
-              <a:t>Clustered errors cover at 92% against a nominal 95%. Significance is read off a wild cluster bootstrap, which leaves only seniority and the ML/AI skill premium standing.</a:t>
+              <a:t>Clustered errors cover at 92% against a nominal 95%. Significance is read off a wild cluster bootstrap, which leaves 2 predictor(s) standing: a South location, seniority.</a:t>
             </a:r>
             <a:endParaRPr lang="en-US" sz="1300" dirty="0"/>
           </a:p>

--- a/paper/presentation.pptx
+++ b/paper/presentation.pptx
@@ -509,7 +509,7 @@
           <a:p>
             <a:r>
               <a:rPr lang="en-US" dirty="0"/>
-              <a:t>Current estimation sample: 120 postings with a disclosed pay range. The dependent variable is the log of the midpoint of the employer-stated range, annualized.</a:t>
+              <a:t>Current estimation sample: 147 postings with a disclosed pay range. The dependent variable is the log of the midpoint of the employer-stated range, annualized.</a:t>
             </a:r>
             <a:endParaRPr lang="en-US" dirty="0"/>
           </a:p>
@@ -2656,7 +2656,7 @@
                 <a:ea typeface="Calibri" pitchFamily="34" charset="-122"/>
                 <a:cs typeface="Calibri" pitchFamily="34" charset="-120"/>
               </a:rPr>
-              <a:t>disclose (n=100)</a:t>
+              <a:t>disclose (n=110)</a:t>
             </a:r>
             <a:endParaRPr lang="en-US" sz="1200" dirty="0"/>
           </a:p>
@@ -2722,7 +2722,7 @@
                 <a:ea typeface="Calibri" pitchFamily="34" charset="-122"/>
                 <a:cs typeface="Calibri" pitchFamily="34" charset="-120"/>
               </a:rPr>
-              <a:t>39%</a:t>
+              <a:t>53%</a:t>
             </a:r>
             <a:endParaRPr lang="en-US" sz="4000" dirty="0"/>
           </a:p>
@@ -2761,7 +2761,7 @@
                 <a:ea typeface="Calibri" pitchFamily="34" charset="-122"/>
                 <a:cs typeface="Calibri" pitchFamily="34" charset="-120"/>
               </a:rPr>
-              <a:t>disclose without one (n=56)</a:t>
+              <a:t>disclose without one (n=73)</a:t>
             </a:r>
             <a:endParaRPr lang="en-US" sz="1200" dirty="0"/>
           </a:p>
@@ -3041,7 +3041,7 @@
                 <a:ea typeface="Calibri" pitchFamily="34" charset="-122"/>
                 <a:cs typeface="Calibri" pitchFamily="34" charset="-120"/>
               </a:rPr>
-              <a:t>Retrieved: 1716</a:t>
+              <a:t>Retrieved: 1940</a:t>
             </a:r>
             <a:endParaRPr lang="en-US" sz="1400" dirty="0"/>
           </a:p>
@@ -3062,7 +3062,7 @@
                 <a:ea typeface="Calibri" pitchFamily="34" charset="-122"/>
                 <a:cs typeface="Calibri" pitchFamily="34" charset="-120"/>
               </a:rPr>
-              <a:t>Passed screens: 389</a:t>
+              <a:t>Passed screens: 449</a:t>
             </a:r>
             <a:endParaRPr lang="en-US" sz="1400" dirty="0"/>
           </a:p>
@@ -3083,7 +3083,7 @@
                 <a:ea typeface="Calibri" pitchFamily="34" charset="-122"/>
                 <a:cs typeface="Calibri" pitchFamily="34" charset="-120"/>
               </a:rPr>
-              <a:t>In a study metro: 307</a:t>
+              <a:t>In a study metro: 333</a:t>
             </a:r>
             <a:endParaRPr lang="en-US" sz="1400" dirty="0"/>
           </a:p>
@@ -3104,7 +3104,7 @@
                 <a:ea typeface="Calibri" pitchFamily="34" charset="-122"/>
                 <a:cs typeface="Calibri" pitchFamily="34" charset="-120"/>
               </a:rPr>
-              <a:t>Unique postings: 156</a:t>
+              <a:t>Unique postings: 183</a:t>
             </a:r>
             <a:endParaRPr lang="en-US" sz="1400" dirty="0"/>
           </a:p>
@@ -3125,7 +3125,7 @@
                 <a:ea typeface="Calibri" pitchFamily="34" charset="-122"/>
                 <a:cs typeface="Calibri" pitchFamily="34" charset="-120"/>
               </a:rPr>
-              <a:t>Pay disclosed: 120</a:t>
+              <a:t>Pay disclosed: 147</a:t>
             </a:r>
             <a:endParaRPr lang="en-US" sz="1400" dirty="0"/>
           </a:p>
@@ -3304,7 +3304,7 @@
                 <a:ea typeface="Calibri" pitchFamily="34" charset="-122"/>
                 <a:cs typeface="Calibri" pitchFamily="34" charset="-120"/>
               </a:rPr>
-              <a:t>57–61pp</a:t>
+              <a:t>44–47pp</a:t>
             </a:r>
             <a:endParaRPr lang="en-US" sz="4000" dirty="0"/>
           </a:p>
@@ -3409,7 +3409,7 @@
                 <a:ea typeface="Calibri" pitchFamily="34" charset="-122"/>
                 <a:cs typeface="Calibri" pitchFamily="34" charset="-120"/>
               </a:rPr>
-              <a:t>120</a:t>
+              <a:t>147</a:t>
             </a:r>
             <a:endParaRPr lang="en-US" sz="4000" dirty="0"/>
           </a:p>
@@ -3448,7 +3448,7 @@
                 <a:ea typeface="Calibri" pitchFamily="34" charset="-122"/>
                 <a:cs typeface="Calibri" pitchFamily="34" charset="-120"/>
               </a:rPr>
-              <a:t>postings, 25 employers</a:t>
+              <a:t>postings, 29 employers</a:t>
             </a:r>
             <a:endParaRPr lang="en-US" sz="1200" dirty="0"/>
           </a:p>
@@ -3514,7 +3514,7 @@
                 <a:ea typeface="Calibri" pitchFamily="34" charset="-122"/>
                 <a:cs typeface="Calibri" pitchFamily="34" charset="-120"/>
               </a:rPr>
-              <a:t>2</a:t>
+              <a:t>1</a:t>
             </a:r>
             <a:endParaRPr lang="en-US" sz="4000" dirty="0"/>
           </a:p>
@@ -3623,7 +3623,7 @@
                 <a:ea typeface="Calibri" pitchFamily="34" charset="-122"/>
                 <a:cs typeface="Calibri" pitchFamily="34" charset="-120"/>
               </a:rPr>
-              <a:t>Within disclosed pay, a South location, seniority are the only attributes distinguishable from zero</a:t>
+              <a:t>Within disclosed pay, seniority is the only attribute distinguishable from zero</a:t>
             </a:r>
             <a:endParaRPr lang="en-US" sz="1500" dirty="0"/>
           </a:p>
@@ -3647,7 +3647,7 @@
                 <a:ea typeface="Calibri" pitchFamily="34" charset="-122"/>
                 <a:cs typeface="Calibri" pitchFamily="34" charset="-120"/>
               </a:rPr>
-              <a:t>3 coefficients reach significance under clustered standard errors and do NOT survive the wild cluster bootstrap — reported as inconclusive, not as findings</a:t>
+              <a:t>2 coefficients reach significance under clustered standard errors and do NOT survive the wild cluster bootstrap — reported as inconclusive, not as findings</a:t>
             </a:r>
             <a:endParaRPr lang="en-US" sz="1500" dirty="0"/>
           </a:p>
@@ -4272,7 +4272,7 @@
                 <a:ea typeface="Calibri" pitchFamily="34" charset="-122"/>
                 <a:cs typeface="Calibri" pitchFamily="34" charset="-120"/>
               </a:rPr>
-              <a:t>Clustered errors cover at 92% against a nominal 95%. Significance is read off a wild cluster bootstrap, which leaves 2 predictor(s) standing: a South location, seniority.</a:t>
+              <a:t>Clustered errors cover at 92% against a nominal 95%. Significance is read off a wild cluster bootstrap, which leaves 1 predictor(s) standing: seniority.</a:t>
             </a:r>
             <a:endParaRPr lang="en-US" sz="1300" dirty="0"/>
           </a:p>

--- a/paper/presentation.pptx
+++ b/paper/presentation.pptx
@@ -509,7 +509,7 @@
           <a:p>
             <a:r>
               <a:rPr lang="en-US" dirty="0"/>
-              <a:t>Current estimation sample: 147 postings with a disclosed pay range. The dependent variable is the log of the midpoint of the employer-stated range, annualized.</a:t>
+              <a:t>Current estimation sample: 165 postings with a disclosed pay range. The dependent variable is the log of the midpoint of the employer-stated range, annualized.</a:t>
             </a:r>
             <a:endParaRPr lang="en-US" dirty="0"/>
           </a:p>
@@ -2617,7 +2617,7 @@
                 <a:ea typeface="Calibri" pitchFamily="34" charset="-122"/>
                 <a:cs typeface="Calibri" pitchFamily="34" charset="-120"/>
               </a:rPr>
-              <a:t>98%</a:t>
+              <a:t>96%</a:t>
             </a:r>
             <a:endParaRPr lang="en-US" sz="4000" dirty="0"/>
           </a:p>
@@ -2656,7 +2656,7 @@
                 <a:ea typeface="Calibri" pitchFamily="34" charset="-122"/>
                 <a:cs typeface="Calibri" pitchFamily="34" charset="-120"/>
               </a:rPr>
-              <a:t>disclose (n=110)</a:t>
+              <a:t>disclose (n=129)</a:t>
             </a:r>
             <a:endParaRPr lang="en-US" sz="1200" dirty="0"/>
           </a:p>
@@ -2722,7 +2722,7 @@
                 <a:ea typeface="Calibri" pitchFamily="34" charset="-122"/>
                 <a:cs typeface="Calibri" pitchFamily="34" charset="-120"/>
               </a:rPr>
-              <a:t>53%</a:t>
+              <a:t>51%</a:t>
             </a:r>
             <a:endParaRPr lang="en-US" sz="4000" dirty="0"/>
           </a:p>
@@ -2761,7 +2761,7 @@
                 <a:ea typeface="Calibri" pitchFamily="34" charset="-122"/>
                 <a:cs typeface="Calibri" pitchFamily="34" charset="-120"/>
               </a:rPr>
-              <a:t>disclose without one (n=73)</a:t>
+              <a:t>disclose without one (n=81)</a:t>
             </a:r>
             <a:endParaRPr lang="en-US" sz="1200" dirty="0"/>
           </a:p>
@@ -3062,7 +3062,7 @@
                 <a:ea typeface="Calibri" pitchFamily="34" charset="-122"/>
                 <a:cs typeface="Calibri" pitchFamily="34" charset="-120"/>
               </a:rPr>
-              <a:t>Passed screens: 449</a:t>
+              <a:t>Passed screens: 510</a:t>
             </a:r>
             <a:endParaRPr lang="en-US" sz="1400" dirty="0"/>
           </a:p>
@@ -3083,7 +3083,7 @@
                 <a:ea typeface="Calibri" pitchFamily="34" charset="-122"/>
                 <a:cs typeface="Calibri" pitchFamily="34" charset="-120"/>
               </a:rPr>
-              <a:t>In a study metro: 333</a:t>
+              <a:t>In a study metro: 382</a:t>
             </a:r>
             <a:endParaRPr lang="en-US" sz="1400" dirty="0"/>
           </a:p>
@@ -3104,7 +3104,7 @@
                 <a:ea typeface="Calibri" pitchFamily="34" charset="-122"/>
                 <a:cs typeface="Calibri" pitchFamily="34" charset="-120"/>
               </a:rPr>
-              <a:t>Unique postings: 183</a:t>
+              <a:t>Unique postings: 210</a:t>
             </a:r>
             <a:endParaRPr lang="en-US" sz="1400" dirty="0"/>
           </a:p>
@@ -3125,7 +3125,7 @@
                 <a:ea typeface="Calibri" pitchFamily="34" charset="-122"/>
                 <a:cs typeface="Calibri" pitchFamily="34" charset="-120"/>
               </a:rPr>
-              <a:t>Pay disclosed: 147</a:t>
+              <a:t>Pay disclosed: 165</a:t>
             </a:r>
             <a:endParaRPr lang="en-US" sz="1400" dirty="0"/>
           </a:p>
@@ -3409,7 +3409,7 @@
                 <a:ea typeface="Calibri" pitchFamily="34" charset="-122"/>
                 <a:cs typeface="Calibri" pitchFamily="34" charset="-120"/>
               </a:rPr>
-              <a:t>147</a:t>
+              <a:t>165</a:t>
             </a:r>
             <a:endParaRPr lang="en-US" sz="4000" dirty="0"/>
           </a:p>
@@ -3448,7 +3448,7 @@
                 <a:ea typeface="Calibri" pitchFamily="34" charset="-122"/>
                 <a:cs typeface="Calibri" pitchFamily="34" charset="-120"/>
               </a:rPr>
-              <a:t>postings, 29 employers</a:t>
+              <a:t>postings, 33 employers</a:t>
             </a:r>
             <a:endParaRPr lang="en-US" sz="1200" dirty="0"/>
           </a:p>
@@ -3514,7 +3514,7 @@
                 <a:ea typeface="Calibri" pitchFamily="34" charset="-122"/>
                 <a:cs typeface="Calibri" pitchFamily="34" charset="-120"/>
               </a:rPr>
-              <a:t>1</a:t>
+              <a:t>3</a:t>
             </a:r>
             <a:endParaRPr lang="en-US" sz="4000" dirty="0"/>
           </a:p>
@@ -3623,7 +3623,7 @@
                 <a:ea typeface="Calibri" pitchFamily="34" charset="-122"/>
                 <a:cs typeface="Calibri" pitchFamily="34" charset="-120"/>
               </a:rPr>
-              <a:t>Within disclosed pay, seniority is the only attribute distinguishable from zero</a:t>
+              <a:t>Within disclosed pay, seniority, a South location, a Northeast location are the only attributes distinguishable from zero</a:t>
             </a:r>
             <a:endParaRPr lang="en-US" sz="1500" dirty="0"/>
           </a:p>
@@ -3647,7 +3647,7 @@
                 <a:ea typeface="Calibri" pitchFamily="34" charset="-122"/>
                 <a:cs typeface="Calibri" pitchFamily="34" charset="-120"/>
               </a:rPr>
-              <a:t>2 coefficients reach significance under clustered standard errors and do NOT survive the wild cluster bootstrap — reported as inconclusive, not as findings</a:t>
+              <a:t>0 coefficients reach significance under clustered standard errors and do NOT survive the wild cluster bootstrap — reported as inconclusive, not as findings</a:t>
             </a:r>
             <a:endParaRPr lang="en-US" sz="1500" dirty="0"/>
           </a:p>
@@ -4272,7 +4272,7 @@
                 <a:ea typeface="Calibri" pitchFamily="34" charset="-122"/>
                 <a:cs typeface="Calibri" pitchFamily="34" charset="-120"/>
               </a:rPr>
-              <a:t>Clustered errors cover at 92% against a nominal 95%. Significance is read off a wild cluster bootstrap, which leaves 1 predictor(s) standing: seniority.</a:t>
+              <a:t>Clustered errors cover at 92% against a nominal 95%. Significance is read off a wild cluster bootstrap, which leaves 3 predictor(s) standing: seniority, a South location, a Northeast location.</a:t>
             </a:r>
             <a:endParaRPr lang="en-US" sz="1300" dirty="0"/>
           </a:p>

--- a/paper/presentation.pptx
+++ b/paper/presentation.pptx
@@ -509,7 +509,7 @@
           <a:p>
             <a:r>
               <a:rPr lang="en-US" dirty="0"/>
-              <a:t>Current estimation sample: 165 postings with a disclosed pay range. The dependent variable is the log of the midpoint of the employer-stated range, annualized.</a:t>
+              <a:t>Current estimation sample: 214 postings with a disclosed pay range. The dependent variable is the log of the midpoint of the employer-stated range, annualized.</a:t>
             </a:r>
             <a:endParaRPr lang="en-US" dirty="0"/>
           </a:p>
@@ -773,7 +773,7 @@
           <a:p>
             <a:r>
               <a:rPr lang="en-US" dirty="0"/>
-              <a:t>Illinois HB 3129 was the original motivation; the study is national now and the contrast spans 16 jurisdictions.</a:t>
+              <a:t>Illinois HB 3129 was the original motivation; the study is national now and the contrast spans 13 jurisdictions in force at collection.</a:t>
             </a:r>
             <a:endParaRPr lang="en-US" dirty="0"/>
           </a:p>
@@ -2054,7 +2054,7 @@
                 <a:ea typeface="Calibri" pitchFamily="34" charset="-122"/>
                 <a:cs typeface="Calibri" pitchFamily="34" charset="-120"/>
               </a:rPr>
-              <a:t>16</a:t>
+              <a:t>13</a:t>
             </a:r>
             <a:endParaRPr lang="en-US" sz="4000" dirty="0"/>
           </a:p>
@@ -2093,7 +2093,7 @@
                 <a:ea typeface="Calibri" pitchFamily="34" charset="-122"/>
                 <a:cs typeface="Calibri" pitchFamily="34" charset="-120"/>
               </a:rPr>
-              <a:t>states mandating pay in the posting</a:t>
+              <a:t>jurisdictions mandating pay in the posting</a:t>
             </a:r>
             <a:endParaRPr lang="en-US" sz="1200" dirty="0"/>
           </a:p>
@@ -2512,7 +2512,7 @@
                 <a:ea typeface="Calibri" pitchFamily="34" charset="-122"/>
                 <a:cs typeface="Calibri" pitchFamily="34" charset="-120"/>
               </a:rPr>
-              <a:t>16</a:t>
+              <a:t>13</a:t>
             </a:r>
             <a:endParaRPr lang="en-US" sz="4000" dirty="0"/>
           </a:p>
@@ -2617,7 +2617,7 @@
                 <a:ea typeface="Calibri" pitchFamily="34" charset="-122"/>
                 <a:cs typeface="Calibri" pitchFamily="34" charset="-120"/>
               </a:rPr>
-              <a:t>96%</a:t>
+              <a:t>94%</a:t>
             </a:r>
             <a:endParaRPr lang="en-US" sz="4000" dirty="0"/>
           </a:p>
@@ -2656,7 +2656,7 @@
                 <a:ea typeface="Calibri" pitchFamily="34" charset="-122"/>
                 <a:cs typeface="Calibri" pitchFamily="34" charset="-120"/>
               </a:rPr>
-              <a:t>disclose (n=129)</a:t>
+              <a:t>disclose (n=164)</a:t>
             </a:r>
             <a:endParaRPr lang="en-US" sz="1200" dirty="0"/>
           </a:p>
@@ -2722,7 +2722,7 @@
                 <a:ea typeface="Calibri" pitchFamily="34" charset="-122"/>
                 <a:cs typeface="Calibri" pitchFamily="34" charset="-120"/>
               </a:rPr>
-              <a:t>51%</a:t>
+              <a:t>48%</a:t>
             </a:r>
             <a:endParaRPr lang="en-US" sz="4000" dirty="0"/>
           </a:p>
@@ -2761,7 +2761,7 @@
                 <a:ea typeface="Calibri" pitchFamily="34" charset="-122"/>
                 <a:cs typeface="Calibri" pitchFamily="34" charset="-120"/>
               </a:rPr>
-              <a:t>disclose without one (n=81)</a:t>
+              <a:t>disclose without one (n=126)</a:t>
             </a:r>
             <a:endParaRPr lang="en-US" sz="1200" dirty="0"/>
           </a:p>
@@ -2982,7 +2982,7 @@
       </p:sp>
       <p:pic>
         <p:nvPicPr>
-          <p:cNvPr id="3" name="Image 0" descr="/home/user/modern-labor-market-data-submission/paper/figures/fig1_funnel.png">    </p:cNvPr>
+          <p:cNvPr id="3" name="Image 0" descr="/home/user/Modern-Labor-Market-Data-Submission/paper/figures/fig1_funnel.png">    </p:cNvPr>
           <p:cNvPicPr>
             <a:picLocks noChangeAspect="1"/>
           </p:cNvPicPr>
@@ -3041,7 +3041,7 @@
                 <a:ea typeface="Calibri" pitchFamily="34" charset="-122"/>
                 <a:cs typeface="Calibri" pitchFamily="34" charset="-120"/>
               </a:rPr>
-              <a:t>Retrieved: 1940</a:t>
+              <a:t>Retrieved: 2084</a:t>
             </a:r>
             <a:endParaRPr lang="en-US" sz="1400" dirty="0"/>
           </a:p>
@@ -3062,7 +3062,7 @@
                 <a:ea typeface="Calibri" pitchFamily="34" charset="-122"/>
                 <a:cs typeface="Calibri" pitchFamily="34" charset="-120"/>
               </a:rPr>
-              <a:t>Passed screens: 510</a:t>
+              <a:t>Passed screens: 577</a:t>
             </a:r>
             <a:endParaRPr lang="en-US" sz="1400" dirty="0"/>
           </a:p>
@@ -3083,7 +3083,7 @@
                 <a:ea typeface="Calibri" pitchFamily="34" charset="-122"/>
                 <a:cs typeface="Calibri" pitchFamily="34" charset="-120"/>
               </a:rPr>
-              <a:t>In a study metro: 382</a:t>
+              <a:t>Located in the US: 450</a:t>
             </a:r>
             <a:endParaRPr lang="en-US" sz="1400" dirty="0"/>
           </a:p>
@@ -3104,7 +3104,7 @@
                 <a:ea typeface="Calibri" pitchFamily="34" charset="-122"/>
                 <a:cs typeface="Calibri" pitchFamily="34" charset="-120"/>
               </a:rPr>
-              <a:t>Unique postings: 210</a:t>
+              <a:t>Unique postings: 290</a:t>
             </a:r>
             <a:endParaRPr lang="en-US" sz="1400" dirty="0"/>
           </a:p>
@@ -3125,7 +3125,7 @@
                 <a:ea typeface="Calibri" pitchFamily="34" charset="-122"/>
                 <a:cs typeface="Calibri" pitchFamily="34" charset="-120"/>
               </a:rPr>
-              <a:t>Pay disclosed: 165</a:t>
+              <a:t>Pay disclosed: 214</a:t>
             </a:r>
             <a:endParaRPr lang="en-US" sz="1400" dirty="0"/>
           </a:p>
@@ -3304,7 +3304,7 @@
                 <a:ea typeface="Calibri" pitchFamily="34" charset="-122"/>
                 <a:cs typeface="Calibri" pitchFamily="34" charset="-120"/>
               </a:rPr>
-              <a:t>44–47pp</a:t>
+              <a:t>44–49pp</a:t>
             </a:r>
             <a:endParaRPr lang="en-US" sz="4000" dirty="0"/>
           </a:p>
@@ -3409,7 +3409,7 @@
                 <a:ea typeface="Calibri" pitchFamily="34" charset="-122"/>
                 <a:cs typeface="Calibri" pitchFamily="34" charset="-120"/>
               </a:rPr>
-              <a:t>165</a:t>
+              <a:t>214</a:t>
             </a:r>
             <a:endParaRPr lang="en-US" sz="4000" dirty="0"/>
           </a:p>
@@ -3448,7 +3448,7 @@
                 <a:ea typeface="Calibri" pitchFamily="34" charset="-122"/>
                 <a:cs typeface="Calibri" pitchFamily="34" charset="-120"/>
               </a:rPr>
-              <a:t>postings, 33 employers</a:t>
+              <a:t>postings, 34 employers</a:t>
             </a:r>
             <a:endParaRPr lang="en-US" sz="1200" dirty="0"/>
           </a:p>
@@ -3514,7 +3514,7 @@
                 <a:ea typeface="Calibri" pitchFamily="34" charset="-122"/>
                 <a:cs typeface="Calibri" pitchFamily="34" charset="-120"/>
               </a:rPr>
-              <a:t>3</a:t>
+              <a:t>1</a:t>
             </a:r>
             <a:endParaRPr lang="en-US" sz="4000" dirty="0"/>
           </a:p>
@@ -3553,7 +3553,7 @@
                 <a:ea typeface="Calibri" pitchFamily="34" charset="-122"/>
                 <a:cs typeface="Calibri" pitchFamily="34" charset="-120"/>
               </a:rPr>
-              <a:t>predictors surviving the bootstrap</a:t>
+              <a:t>predictors surviving the bootstrap and the region check</a:t>
             </a:r>
             <a:endParaRPr lang="en-US" sz="1200" dirty="0"/>
           </a:p>
@@ -3623,7 +3623,7 @@
                 <a:ea typeface="Calibri" pitchFamily="34" charset="-122"/>
                 <a:cs typeface="Calibri" pitchFamily="34" charset="-120"/>
               </a:rPr>
-              <a:t>Within disclosed pay, seniority, a South location, a Northeast location are the only attributes distinguishable from zero</a:t>
+              <a:t>Within disclosed pay, seniority is the only attribute distinguishable from zero</a:t>
             </a:r>
             <a:endParaRPr lang="en-US" sz="1500" dirty="0"/>
           </a:p>
@@ -3647,7 +3647,7 @@
                 <a:ea typeface="Calibri" pitchFamily="34" charset="-122"/>
                 <a:cs typeface="Calibri" pitchFamily="34" charset="-120"/>
               </a:rPr>
-              <a:t>0 coefficients reach significance under clustered standard errors and do NOT survive the wild cluster bootstrap — reported as inconclusive, not as findings</a:t>
+              <a:t>2 coefficients reach significance under clustered standard errors and do NOT survive the wild cluster bootstrap — reported as inconclusive, not as findings</a:t>
             </a:r>
             <a:endParaRPr lang="en-US" sz="1500" dirty="0"/>
           </a:p>
@@ -4272,7 +4272,7 @@
                 <a:ea typeface="Calibri" pitchFamily="34" charset="-122"/>
                 <a:cs typeface="Calibri" pitchFamily="34" charset="-120"/>
               </a:rPr>
-              <a:t>Clustered errors cover at 92% against a nominal 95%. Significance is read off a wild cluster bootstrap, which leaves 3 predictor(s) standing: seniority, a South location, a Northeast location.</a:t>
+              <a:t>Clustered errors cover at 92% against a nominal 95%. Significance is read off a wild cluster bootstrap, which leaves 1 predictor(s) standing: seniority.</a:t>
             </a:r>
             <a:endParaRPr lang="en-US" sz="1300" dirty="0"/>
           </a:p>
@@ -4447,7 +4447,7 @@
                 <a:ea typeface="Calibri" pitchFamily="34" charset="-122"/>
                 <a:cs typeface="Calibri" pitchFamily="34" charset="-120"/>
               </a:rPr>
-              <a:t>Weekly GitHub Actions runs extend the panel; every number traces to data/analysis/.</a:t>
+              <a:t>Scheduled GitHub Actions runs extend the panel; every number traces to data/analysis/.</a:t>
             </a:r>
             <a:endParaRPr lang="en-US" sz="1600" dirty="0"/>
           </a:p>

--- a/paper/presentation.pptx
+++ b/paper/presentation.pptx
@@ -509,7 +509,7 @@
           <a:p>
             <a:r>
               <a:rPr lang="en-US" dirty="0"/>
-              <a:t>Current estimation sample: 214 postings with a disclosed pay range. The dependent variable is the log of the midpoint of the employer-stated range, annualized.</a:t>
+              <a:t>Current estimation sample: 220 postings with a disclosed pay range. The dependent variable is the log of the midpoint of the employer-stated range, annualized.</a:t>
             </a:r>
             <a:endParaRPr lang="en-US" dirty="0"/>
           </a:p>
@@ -2656,7 +2656,7 @@
                 <a:ea typeface="Calibri" pitchFamily="34" charset="-122"/>
                 <a:cs typeface="Calibri" pitchFamily="34" charset="-120"/>
               </a:rPr>
-              <a:t>disclose (n=164)</a:t>
+              <a:t>disclose (n=165)</a:t>
             </a:r>
             <a:endParaRPr lang="en-US" sz="1200" dirty="0"/>
           </a:p>
@@ -2722,7 +2722,7 @@
                 <a:ea typeface="Calibri" pitchFamily="34" charset="-122"/>
                 <a:cs typeface="Calibri" pitchFamily="34" charset="-120"/>
               </a:rPr>
-              <a:t>48%</a:t>
+              <a:t>49%</a:t>
             </a:r>
             <a:endParaRPr lang="en-US" sz="4000" dirty="0"/>
           </a:p>
@@ -2761,7 +2761,7 @@
                 <a:ea typeface="Calibri" pitchFamily="34" charset="-122"/>
                 <a:cs typeface="Calibri" pitchFamily="34" charset="-120"/>
               </a:rPr>
-              <a:t>disclose without one (n=126)</a:t>
+              <a:t>disclose without one (n=132)</a:t>
             </a:r>
             <a:endParaRPr lang="en-US" sz="1200" dirty="0"/>
           </a:p>
@@ -3041,7 +3041,7 @@
                 <a:ea typeface="Calibri" pitchFamily="34" charset="-122"/>
                 <a:cs typeface="Calibri" pitchFamily="34" charset="-120"/>
               </a:rPr>
-              <a:t>Retrieved: 2084</a:t>
+              <a:t>Retrieved: 2253</a:t>
             </a:r>
             <a:endParaRPr lang="en-US" sz="1400" dirty="0"/>
           </a:p>
@@ -3062,7 +3062,7 @@
                 <a:ea typeface="Calibri" pitchFamily="34" charset="-122"/>
                 <a:cs typeface="Calibri" pitchFamily="34" charset="-120"/>
               </a:rPr>
-              <a:t>Passed screens: 577</a:t>
+              <a:t>Passed screens: 585</a:t>
             </a:r>
             <a:endParaRPr lang="en-US" sz="1400" dirty="0"/>
           </a:p>
@@ -3083,7 +3083,7 @@
                 <a:ea typeface="Calibri" pitchFamily="34" charset="-122"/>
                 <a:cs typeface="Calibri" pitchFamily="34" charset="-120"/>
               </a:rPr>
-              <a:t>Located in the US: 450</a:t>
+              <a:t>Located in the US: 457</a:t>
             </a:r>
             <a:endParaRPr lang="en-US" sz="1400" dirty="0"/>
           </a:p>
@@ -3104,7 +3104,7 @@
                 <a:ea typeface="Calibri" pitchFamily="34" charset="-122"/>
                 <a:cs typeface="Calibri" pitchFamily="34" charset="-120"/>
               </a:rPr>
-              <a:t>Unique postings: 290</a:t>
+              <a:t>Unique postings: 297</a:t>
             </a:r>
             <a:endParaRPr lang="en-US" sz="1400" dirty="0"/>
           </a:p>
@@ -3125,7 +3125,7 @@
                 <a:ea typeface="Calibri" pitchFamily="34" charset="-122"/>
                 <a:cs typeface="Calibri" pitchFamily="34" charset="-120"/>
               </a:rPr>
-              <a:t>Pay disclosed: 214</a:t>
+              <a:t>Pay disclosed: 220</a:t>
             </a:r>
             <a:endParaRPr lang="en-US" sz="1400" dirty="0"/>
           </a:p>
@@ -3304,7 +3304,7 @@
                 <a:ea typeface="Calibri" pitchFamily="34" charset="-122"/>
                 <a:cs typeface="Calibri" pitchFamily="34" charset="-120"/>
               </a:rPr>
-              <a:t>44–49pp</a:t>
+              <a:t>42–47pp</a:t>
             </a:r>
             <a:endParaRPr lang="en-US" sz="4000" dirty="0"/>
           </a:p>
@@ -3409,7 +3409,7 @@
                 <a:ea typeface="Calibri" pitchFamily="34" charset="-122"/>
                 <a:cs typeface="Calibri" pitchFamily="34" charset="-120"/>
               </a:rPr>
-              <a:t>214</a:t>
+              <a:t>220</a:t>
             </a:r>
             <a:endParaRPr lang="en-US" sz="4000" dirty="0"/>
           </a:p>
@@ -3514,7 +3514,7 @@
                 <a:ea typeface="Calibri" pitchFamily="34" charset="-122"/>
                 <a:cs typeface="Calibri" pitchFamily="34" charset="-120"/>
               </a:rPr>
-              <a:t>1</a:t>
+              <a:t>3</a:t>
             </a:r>
             <a:endParaRPr lang="en-US" sz="4000" dirty="0"/>
           </a:p>
@@ -3623,7 +3623,7 @@
                 <a:ea typeface="Calibri" pitchFamily="34" charset="-122"/>
                 <a:cs typeface="Calibri" pitchFamily="34" charset="-120"/>
               </a:rPr>
-              <a:t>Within disclosed pay, seniority is the only attribute distinguishable from zero</a:t>
+              <a:t>Within disclosed pay, seniority, a Northeast location, a stated cloud skill are the only attributes distinguishable from zero — a stated cloud skill and a Northeast location only narrowly, so read them as tentative</a:t>
             </a:r>
             <a:endParaRPr lang="en-US" sz="1500" dirty="0"/>
           </a:p>
@@ -4272,7 +4272,7 @@
                 <a:ea typeface="Calibri" pitchFamily="34" charset="-122"/>
                 <a:cs typeface="Calibri" pitchFamily="34" charset="-120"/>
               </a:rPr>
-              <a:t>Clustered errors cover at 92% against a nominal 95%. Significance is read off a wild cluster bootstrap, which leaves 1 predictor(s) standing: seniority.</a:t>
+              <a:t>Clustered errors cover at 92% against a nominal 95%. Significance is read off a wild cluster bootstrap, which leaves 3 predictor(s) standing: seniority, a Northeast location, a stated cloud skill.</a:t>
             </a:r>
             <a:endParaRPr lang="en-US" sz="1300" dirty="0"/>
           </a:p>

--- a/paper/presentation.pptx
+++ b/paper/presentation.pptx
@@ -3568,7 +3568,7 @@
         <p:spPr>
           <a:xfrm>
             <a:off x="640080" y="3108960"/>
-            <a:ext cx="10908792" cy="2377440"/>
+            <a:ext cx="10908792" cy="2651760"/>
           </a:xfrm>
           <a:prstGeom prst="rect">
             <a:avLst/>
@@ -3623,7 +3623,7 @@
                 <a:ea typeface="Calibri" pitchFamily="34" charset="-122"/>
                 <a:cs typeface="Calibri" pitchFamily="34" charset="-120"/>
               </a:rPr>
-              <a:t>Within disclosed pay, seniority, a Northeast location, a stated cloud skill are the only attributes distinguishable from zero — a stated cloud skill and a Northeast location only narrowly, so read them as tentative</a:t>
+              <a:t>Within disclosed pay, seniority, a Northeast location, a stated cloud skill are the only attributes distinguishable from zero — a stated cloud skill and a Northeast location only narrowly, so read them as tentative; a Northeast location does not survive price adjustment</a:t>
             </a:r>
             <a:endParaRPr lang="en-US" sz="1500" dirty="0"/>
           </a:p>

--- a/paper/presentation.pptx
+++ b/paper/presentation.pptx
@@ -509,7 +509,7 @@
           <a:p>
             <a:r>
               <a:rPr lang="en-US" dirty="0"/>
-              <a:t>Current estimation sample: 220 postings with a disclosed pay range. The dependent variable is the log of the midpoint of the employer-stated range, annualized.</a:t>
+              <a:t>Current estimation sample: 264 postings with a disclosed pay range. The dependent variable is the log of the midpoint of the employer-stated range, annualized.</a:t>
             </a:r>
             <a:endParaRPr lang="en-US" dirty="0"/>
           </a:p>
@@ -2656,7 +2656,7 @@
                 <a:ea typeface="Calibri" pitchFamily="34" charset="-122"/>
                 <a:cs typeface="Calibri" pitchFamily="34" charset="-120"/>
               </a:rPr>
-              <a:t>disclose (n=165)</a:t>
+              <a:t>disclose (n=201)</a:t>
             </a:r>
             <a:endParaRPr lang="en-US" sz="1200" dirty="0"/>
           </a:p>
@@ -2722,7 +2722,7 @@
                 <a:ea typeface="Calibri" pitchFamily="34" charset="-122"/>
                 <a:cs typeface="Calibri" pitchFamily="34" charset="-120"/>
               </a:rPr>
-              <a:t>49%</a:t>
+              <a:t>50%</a:t>
             </a:r>
             <a:endParaRPr lang="en-US" sz="4000" dirty="0"/>
           </a:p>
@@ -2761,7 +2761,7 @@
                 <a:ea typeface="Calibri" pitchFamily="34" charset="-122"/>
                 <a:cs typeface="Calibri" pitchFamily="34" charset="-120"/>
               </a:rPr>
-              <a:t>disclose without one (n=132)</a:t>
+              <a:t>disclose without one (n=152)</a:t>
             </a:r>
             <a:endParaRPr lang="en-US" sz="1200" dirty="0"/>
           </a:p>
@@ -3041,7 +3041,7 @@
                 <a:ea typeface="Calibri" pitchFamily="34" charset="-122"/>
                 <a:cs typeface="Calibri" pitchFamily="34" charset="-120"/>
               </a:rPr>
-              <a:t>Retrieved: 2253</a:t>
+              <a:t>Retrieved: 3973</a:t>
             </a:r>
             <a:endParaRPr lang="en-US" sz="1400" dirty="0"/>
           </a:p>
@@ -3062,7 +3062,7 @@
                 <a:ea typeface="Calibri" pitchFamily="34" charset="-122"/>
                 <a:cs typeface="Calibri" pitchFamily="34" charset="-120"/>
               </a:rPr>
-              <a:t>Passed screens: 585</a:t>
+              <a:t>Passed screens: 1320</a:t>
             </a:r>
             <a:endParaRPr lang="en-US" sz="1400" dirty="0"/>
           </a:p>
@@ -3083,7 +3083,7 @@
                 <a:ea typeface="Calibri" pitchFamily="34" charset="-122"/>
                 <a:cs typeface="Calibri" pitchFamily="34" charset="-120"/>
               </a:rPr>
-              <a:t>Located in the US: 457</a:t>
+              <a:t>Located in the US: 1025</a:t>
             </a:r>
             <a:endParaRPr lang="en-US" sz="1400" dirty="0"/>
           </a:p>
@@ -3104,7 +3104,7 @@
                 <a:ea typeface="Calibri" pitchFamily="34" charset="-122"/>
                 <a:cs typeface="Calibri" pitchFamily="34" charset="-120"/>
               </a:rPr>
-              <a:t>Unique postings: 297</a:t>
+              <a:t>Unique postings: 353</a:t>
             </a:r>
             <a:endParaRPr lang="en-US" sz="1400" dirty="0"/>
           </a:p>
@@ -3125,7 +3125,7 @@
                 <a:ea typeface="Calibri" pitchFamily="34" charset="-122"/>
                 <a:cs typeface="Calibri" pitchFamily="34" charset="-120"/>
               </a:rPr>
-              <a:t>Pay disclosed: 220</a:t>
+              <a:t>Pay disclosed: 264</a:t>
             </a:r>
             <a:endParaRPr lang="en-US" sz="1400" dirty="0"/>
           </a:p>
@@ -3409,7 +3409,7 @@
                 <a:ea typeface="Calibri" pitchFamily="34" charset="-122"/>
                 <a:cs typeface="Calibri" pitchFamily="34" charset="-120"/>
               </a:rPr>
-              <a:t>220</a:t>
+              <a:t>264</a:t>
             </a:r>
             <a:endParaRPr lang="en-US" sz="4000" dirty="0"/>
           </a:p>
@@ -3448,7 +3448,7 @@
                 <a:ea typeface="Calibri" pitchFamily="34" charset="-122"/>
                 <a:cs typeface="Calibri" pitchFamily="34" charset="-120"/>
               </a:rPr>
-              <a:t>postings, 34 employers</a:t>
+              <a:t>postings, 36 employers</a:t>
             </a:r>
             <a:endParaRPr lang="en-US" sz="1200" dirty="0"/>
           </a:p>
@@ -3623,7 +3623,7 @@
                 <a:ea typeface="Calibri" pitchFamily="34" charset="-122"/>
                 <a:cs typeface="Calibri" pitchFamily="34" charset="-120"/>
               </a:rPr>
-              <a:t>Within disclosed pay, seniority, a Northeast location, a stated cloud skill are the only attributes distinguishable from zero — a stated cloud skill and a Northeast location only narrowly, so read them as tentative; a Northeast location does not survive price adjustment</a:t>
+              <a:t>Within disclosed pay, seniority, a stated cloud skill, a Northeast location are the only attributes distinguishable from zero — a Northeast location only narrowly, so read it as tentative; a Northeast location does not survive price adjustment</a:t>
             </a:r>
             <a:endParaRPr lang="en-US" sz="1500" dirty="0"/>
           </a:p>
@@ -4272,7 +4272,7 @@
                 <a:ea typeface="Calibri" pitchFamily="34" charset="-122"/>
                 <a:cs typeface="Calibri" pitchFamily="34" charset="-120"/>
               </a:rPr>
-              <a:t>Clustered errors cover at 92% against a nominal 95%. Significance is read off a wild cluster bootstrap, which leaves 3 predictor(s) standing: seniority, a Northeast location, a stated cloud skill.</a:t>
+              <a:t>Clustered errors cover at 92% against a nominal 95%. Significance is read off a wild cluster bootstrap, which leaves 3 predictor(s) standing: seniority, a stated cloud skill, a Northeast location.</a:t>
             </a:r>
             <a:endParaRPr lang="en-US" sz="1300" dirty="0"/>
           </a:p>

--- a/paper/presentation.pptx
+++ b/paper/presentation.pptx
@@ -509,7 +509,7 @@
           <a:p>
             <a:r>
               <a:rPr lang="en-US" dirty="0"/>
-              <a:t>Current estimation sample: 264 postings with a disclosed pay range. The dependent variable is the log of the midpoint of the employer-stated range, annualized.</a:t>
+              <a:t>Current estimation sample: 365 postings with a disclosed pay range. The dependent variable is the log of the midpoint of the employer-stated range, annualized.</a:t>
             </a:r>
             <a:endParaRPr lang="en-US" dirty="0"/>
           </a:p>
@@ -2656,7 +2656,7 @@
                 <a:ea typeface="Calibri" pitchFamily="34" charset="-122"/>
                 <a:cs typeface="Calibri" pitchFamily="34" charset="-120"/>
               </a:rPr>
-              <a:t>disclose (n=201)</a:t>
+              <a:t>disclose (n=282)</a:t>
             </a:r>
             <a:endParaRPr lang="en-US" sz="1200" dirty="0"/>
           </a:p>
@@ -2722,7 +2722,7 @@
                 <a:ea typeface="Calibri" pitchFamily="34" charset="-122"/>
                 <a:cs typeface="Calibri" pitchFamily="34" charset="-120"/>
               </a:rPr>
-              <a:t>50%</a:t>
+              <a:t>49%</a:t>
             </a:r>
             <a:endParaRPr lang="en-US" sz="4000" dirty="0"/>
           </a:p>
@@ -2761,7 +2761,7 @@
                 <a:ea typeface="Calibri" pitchFamily="34" charset="-122"/>
                 <a:cs typeface="Calibri" pitchFamily="34" charset="-120"/>
               </a:rPr>
-              <a:t>disclose without one (n=152)</a:t>
+              <a:t>disclose without one (n=202)</a:t>
             </a:r>
             <a:endParaRPr lang="en-US" sz="1200" dirty="0"/>
           </a:p>
@@ -3041,7 +3041,7 @@
                 <a:ea typeface="Calibri" pitchFamily="34" charset="-122"/>
                 <a:cs typeface="Calibri" pitchFamily="34" charset="-120"/>
               </a:rPr>
-              <a:t>Retrieved: 3973</a:t>
+              <a:t>Retrieved: 4589</a:t>
             </a:r>
             <a:endParaRPr lang="en-US" sz="1400" dirty="0"/>
           </a:p>
@@ -3062,7 +3062,7 @@
                 <a:ea typeface="Calibri" pitchFamily="34" charset="-122"/>
                 <a:cs typeface="Calibri" pitchFamily="34" charset="-120"/>
               </a:rPr>
-              <a:t>Passed screens: 1320</a:t>
+              <a:t>Passed screens: 1225</a:t>
             </a:r>
             <a:endParaRPr lang="en-US" sz="1400" dirty="0"/>
           </a:p>
@@ -3083,7 +3083,7 @@
                 <a:ea typeface="Calibri" pitchFamily="34" charset="-122"/>
                 <a:cs typeface="Calibri" pitchFamily="34" charset="-120"/>
               </a:rPr>
-              <a:t>Located in the US: 1025</a:t>
+              <a:t>Located in the US: 906</a:t>
             </a:r>
             <a:endParaRPr lang="en-US" sz="1400" dirty="0"/>
           </a:p>
@@ -3104,7 +3104,7 @@
                 <a:ea typeface="Calibri" pitchFamily="34" charset="-122"/>
                 <a:cs typeface="Calibri" pitchFamily="34" charset="-120"/>
               </a:rPr>
-              <a:t>Unique postings: 353</a:t>
+              <a:t>Unique postings: 484</a:t>
             </a:r>
             <a:endParaRPr lang="en-US" sz="1400" dirty="0"/>
           </a:p>
@@ -3125,7 +3125,7 @@
                 <a:ea typeface="Calibri" pitchFamily="34" charset="-122"/>
                 <a:cs typeface="Calibri" pitchFamily="34" charset="-120"/>
               </a:rPr>
-              <a:t>Pay disclosed: 264</a:t>
+              <a:t>Pay disclosed: 365</a:t>
             </a:r>
             <a:endParaRPr lang="en-US" sz="1400" dirty="0"/>
           </a:p>
@@ -3304,7 +3304,7 @@
                 <a:ea typeface="Calibri" pitchFamily="34" charset="-122"/>
                 <a:cs typeface="Calibri" pitchFamily="34" charset="-120"/>
               </a:rPr>
-              <a:t>42–47pp</a:t>
+              <a:t>45–48pp</a:t>
             </a:r>
             <a:endParaRPr lang="en-US" sz="4000" dirty="0"/>
           </a:p>
@@ -3409,7 +3409,7 @@
                 <a:ea typeface="Calibri" pitchFamily="34" charset="-122"/>
                 <a:cs typeface="Calibri" pitchFamily="34" charset="-120"/>
               </a:rPr>
-              <a:t>264</a:t>
+              <a:t>365</a:t>
             </a:r>
             <a:endParaRPr lang="en-US" sz="4000" dirty="0"/>
           </a:p>
@@ -3448,7 +3448,7 @@
                 <a:ea typeface="Calibri" pitchFamily="34" charset="-122"/>
                 <a:cs typeface="Calibri" pitchFamily="34" charset="-120"/>
               </a:rPr>
-              <a:t>postings, 36 employers</a:t>
+              <a:t>postings, 52 employers</a:t>
             </a:r>
             <a:endParaRPr lang="en-US" sz="1200" dirty="0"/>
           </a:p>
@@ -3514,7 +3514,7 @@
                 <a:ea typeface="Calibri" pitchFamily="34" charset="-122"/>
                 <a:cs typeface="Calibri" pitchFamily="34" charset="-120"/>
               </a:rPr>
-              <a:t>3</a:t>
+              <a:t>4</a:t>
             </a:r>
             <a:endParaRPr lang="en-US" sz="4000" dirty="0"/>
           </a:p>
@@ -3623,7 +3623,7 @@
                 <a:ea typeface="Calibri" pitchFamily="34" charset="-122"/>
                 <a:cs typeface="Calibri" pitchFamily="34" charset="-120"/>
               </a:rPr>
-              <a:t>Within disclosed pay, seniority, a stated cloud skill, a Northeast location are the only attributes distinguishable from zero — a Northeast location only narrowly, so read it as tentative; a Northeast location does not survive price adjustment</a:t>
+              <a:t>Within disclosed pay, seniority, yrs_exp_min, a Northeast location, a stated cloud skill are the only attributes distinguishable from zero — a stated cloud skill and a Northeast location only narrowly, so read them as tentative; a Northeast location does not survive price adjustment</a:t>
             </a:r>
             <a:endParaRPr lang="en-US" sz="1500" dirty="0"/>
           </a:p>
@@ -3647,7 +3647,7 @@
                 <a:ea typeface="Calibri" pitchFamily="34" charset="-122"/>
                 <a:cs typeface="Calibri" pitchFamily="34" charset="-120"/>
               </a:rPr>
-              <a:t>2 coefficients reach significance under clustered standard errors and do NOT survive the wild cluster bootstrap — reported as inconclusive, not as findings</a:t>
+              <a:t>3 coefficients reach significance under clustered standard errors and do NOT survive the wild cluster bootstrap — reported as inconclusive, not as findings</a:t>
             </a:r>
             <a:endParaRPr lang="en-US" sz="1500" dirty="0"/>
           </a:p>
@@ -4272,7 +4272,7 @@
                 <a:ea typeface="Calibri" pitchFamily="34" charset="-122"/>
                 <a:cs typeface="Calibri" pitchFamily="34" charset="-120"/>
               </a:rPr>
-              <a:t>Clustered errors cover at 92% against a nominal 95%. Significance is read off a wild cluster bootstrap, which leaves 3 predictor(s) standing: seniority, a stated cloud skill, a Northeast location.</a:t>
+              <a:t>Clustered errors cover at 92% against a nominal 95%. Significance is read off a wild cluster bootstrap, which leaves 4 predictor(s) standing: seniority, yrs_exp_min, a Northeast location, a stated cloud skill.</a:t>
             </a:r>
             <a:endParaRPr lang="en-US" sz="1300" dirty="0"/>
           </a:p>

--- a/paper/presentation.pptx
+++ b/paper/presentation.pptx
@@ -509,7 +509,7 @@
           <a:p>
             <a:r>
               <a:rPr lang="en-US" dirty="0"/>
-              <a:t>Current estimation sample: 365 postings with a disclosed pay range. The dependent variable is the log of the midpoint of the employer-stated range, annualized.</a:t>
+              <a:t>Current estimation sample: 377 postings with a disclosed pay range. The dependent variable is the log of the midpoint of the employer-stated range, annualized.</a:t>
             </a:r>
             <a:endParaRPr lang="en-US" dirty="0"/>
           </a:p>
@@ -2656,7 +2656,7 @@
                 <a:ea typeface="Calibri" pitchFamily="34" charset="-122"/>
                 <a:cs typeface="Calibri" pitchFamily="34" charset="-120"/>
               </a:rPr>
-              <a:t>disclose (n=282)</a:t>
+              <a:t>disclose (n=294)</a:t>
             </a:r>
             <a:endParaRPr lang="en-US" sz="1200" dirty="0"/>
           </a:p>
@@ -2761,7 +2761,7 @@
                 <a:ea typeface="Calibri" pitchFamily="34" charset="-122"/>
                 <a:cs typeface="Calibri" pitchFamily="34" charset="-120"/>
               </a:rPr>
-              <a:t>disclose without one (n=202)</a:t>
+              <a:t>disclose without one (n=203)</a:t>
             </a:r>
             <a:endParaRPr lang="en-US" sz="1200" dirty="0"/>
           </a:p>
@@ -3083,7 +3083,7 @@
                 <a:ea typeface="Calibri" pitchFamily="34" charset="-122"/>
                 <a:cs typeface="Calibri" pitchFamily="34" charset="-120"/>
               </a:rPr>
-              <a:t>Located in the US: 906</a:t>
+              <a:t>Located in the US: 933</a:t>
             </a:r>
             <a:endParaRPr lang="en-US" sz="1400" dirty="0"/>
           </a:p>
@@ -3104,7 +3104,7 @@
                 <a:ea typeface="Calibri" pitchFamily="34" charset="-122"/>
                 <a:cs typeface="Calibri" pitchFamily="34" charset="-120"/>
               </a:rPr>
-              <a:t>Unique postings: 484</a:t>
+              <a:t>Unique postings: 497</a:t>
             </a:r>
             <a:endParaRPr lang="en-US" sz="1400" dirty="0"/>
           </a:p>
@@ -3125,7 +3125,7 @@
                 <a:ea typeface="Calibri" pitchFamily="34" charset="-122"/>
                 <a:cs typeface="Calibri" pitchFamily="34" charset="-120"/>
               </a:rPr>
-              <a:t>Pay disclosed: 365</a:t>
+              <a:t>Pay disclosed: 377</a:t>
             </a:r>
             <a:endParaRPr lang="en-US" sz="1400" dirty="0"/>
           </a:p>
@@ -3304,7 +3304,7 @@
                 <a:ea typeface="Calibri" pitchFamily="34" charset="-122"/>
                 <a:cs typeface="Calibri" pitchFamily="34" charset="-120"/>
               </a:rPr>
-              <a:t>45–48pp</a:t>
+              <a:t>44–48pp</a:t>
             </a:r>
             <a:endParaRPr lang="en-US" sz="4000" dirty="0"/>
           </a:p>
@@ -3409,7 +3409,7 @@
                 <a:ea typeface="Calibri" pitchFamily="34" charset="-122"/>
                 <a:cs typeface="Calibri" pitchFamily="34" charset="-120"/>
               </a:rPr>
-              <a:t>365</a:t>
+              <a:t>377</a:t>
             </a:r>
             <a:endParaRPr lang="en-US" sz="4000" dirty="0"/>
           </a:p>
@@ -3623,7 +3623,7 @@
                 <a:ea typeface="Calibri" pitchFamily="34" charset="-122"/>
                 <a:cs typeface="Calibri" pitchFamily="34" charset="-120"/>
               </a:rPr>
-              <a:t>Within disclosed pay, seniority, yrs_exp_min, a Northeast location, a stated cloud skill are the only attributes distinguishable from zero — a stated cloud skill and a Northeast location only narrowly, so read them as tentative; a Northeast location does not survive price adjustment</a:t>
+              <a:t>Within disclosed pay, seniority, a Northeast location, yrs_exp_min, a stated cloud skill are the only attributes distinguishable from zero — a stated cloud skill only narrowly, so read it as tentative; a Northeast location does not survive price adjustment</a:t>
             </a:r>
             <a:endParaRPr lang="en-US" sz="1500" dirty="0"/>
           </a:p>
@@ -3647,7 +3647,7 @@
                 <a:ea typeface="Calibri" pitchFamily="34" charset="-122"/>
                 <a:cs typeface="Calibri" pitchFamily="34" charset="-120"/>
               </a:rPr>
-              <a:t>3 coefficients reach significance under clustered standard errors and do NOT survive the wild cluster bootstrap — reported as inconclusive, not as findings</a:t>
+              <a:t>2 coefficients reach significance under clustered standard errors and do NOT survive the wild cluster bootstrap — reported as inconclusive, not as findings</a:t>
             </a:r>
             <a:endParaRPr lang="en-US" sz="1500" dirty="0"/>
           </a:p>
@@ -4272,7 +4272,7 @@
                 <a:ea typeface="Calibri" pitchFamily="34" charset="-122"/>
                 <a:cs typeface="Calibri" pitchFamily="34" charset="-120"/>
               </a:rPr>
-              <a:t>Clustered errors cover at 92% against a nominal 95%. Significance is read off a wild cluster bootstrap, which leaves 4 predictor(s) standing: seniority, yrs_exp_min, a Northeast location, a stated cloud skill.</a:t>
+              <a:t>Clustered errors cover at 92% against a nominal 95%. Significance is read off a wild cluster bootstrap, which leaves 4 predictor(s) standing: seniority, a Northeast location, yrs_exp_min, a stated cloud skill.</a:t>
             </a:r>
             <a:endParaRPr lang="en-US" sz="1300" dirty="0"/>
           </a:p>

--- a/paper/presentation.pptx
+++ b/paper/presentation.pptx
@@ -509,7 +509,7 @@
           <a:p>
             <a:r>
               <a:rPr lang="en-US" dirty="0"/>
-              <a:t>Current estimation sample: 377 postings with a disclosed pay range. The dependent variable is the log of the midpoint of the employer-stated range, annualized.</a:t>
+              <a:t>Current estimation sample: 472 postings with a disclosed pay range. The dependent variable is the log of the midpoint of the employer-stated range, annualized.</a:t>
             </a:r>
             <a:endParaRPr lang="en-US" dirty="0"/>
           </a:p>
@@ -2617,7 +2617,7 @@
                 <a:ea typeface="Calibri" pitchFamily="34" charset="-122"/>
                 <a:cs typeface="Calibri" pitchFamily="34" charset="-120"/>
               </a:rPr>
-              <a:t>94%</a:t>
+              <a:t>92%</a:t>
             </a:r>
             <a:endParaRPr lang="en-US" sz="4000" dirty="0"/>
           </a:p>
@@ -2656,7 +2656,7 @@
                 <a:ea typeface="Calibri" pitchFamily="34" charset="-122"/>
                 <a:cs typeface="Calibri" pitchFamily="34" charset="-120"/>
               </a:rPr>
-              <a:t>disclose (n=294)</a:t>
+              <a:t>disclose (n=384)</a:t>
             </a:r>
             <a:endParaRPr lang="en-US" sz="1200" dirty="0"/>
           </a:p>
@@ -2761,7 +2761,7 @@
                 <a:ea typeface="Calibri" pitchFamily="34" charset="-122"/>
                 <a:cs typeface="Calibri" pitchFamily="34" charset="-120"/>
               </a:rPr>
-              <a:t>disclose without one (n=203)</a:t>
+              <a:t>disclose without one (n=247)</a:t>
             </a:r>
             <a:endParaRPr lang="en-US" sz="1200" dirty="0"/>
           </a:p>
@@ -3041,7 +3041,7 @@
                 <a:ea typeface="Calibri" pitchFamily="34" charset="-122"/>
                 <a:cs typeface="Calibri" pitchFamily="34" charset="-120"/>
               </a:rPr>
-              <a:t>Retrieved: 4589</a:t>
+              <a:t>Retrieved: 8226</a:t>
             </a:r>
             <a:endParaRPr lang="en-US" sz="1400" dirty="0"/>
           </a:p>
@@ -3062,7 +3062,7 @@
                 <a:ea typeface="Calibri" pitchFamily="34" charset="-122"/>
                 <a:cs typeface="Calibri" pitchFamily="34" charset="-120"/>
               </a:rPr>
-              <a:t>Passed screens: 1225</a:t>
+              <a:t>Passed screens: 2044</a:t>
             </a:r>
             <a:endParaRPr lang="en-US" sz="1400" dirty="0"/>
           </a:p>
@@ -3083,7 +3083,7 @@
                 <a:ea typeface="Calibri" pitchFamily="34" charset="-122"/>
                 <a:cs typeface="Calibri" pitchFamily="34" charset="-120"/>
               </a:rPr>
-              <a:t>Located in the US: 933</a:t>
+              <a:t>Located in the US: 1530</a:t>
             </a:r>
             <a:endParaRPr lang="en-US" sz="1400" dirty="0"/>
           </a:p>
@@ -3104,7 +3104,7 @@
                 <a:ea typeface="Calibri" pitchFamily="34" charset="-122"/>
                 <a:cs typeface="Calibri" pitchFamily="34" charset="-120"/>
               </a:rPr>
-              <a:t>Unique postings: 497</a:t>
+              <a:t>Unique postings: 631</a:t>
             </a:r>
             <a:endParaRPr lang="en-US" sz="1400" dirty="0"/>
           </a:p>
@@ -3125,7 +3125,7 @@
                 <a:ea typeface="Calibri" pitchFamily="34" charset="-122"/>
                 <a:cs typeface="Calibri" pitchFamily="34" charset="-120"/>
               </a:rPr>
-              <a:t>Pay disclosed: 377</a:t>
+              <a:t>Pay disclosed: 472</a:t>
             </a:r>
             <a:endParaRPr lang="en-US" sz="1400" dirty="0"/>
           </a:p>
@@ -3304,7 +3304,7 @@
                 <a:ea typeface="Calibri" pitchFamily="34" charset="-122"/>
                 <a:cs typeface="Calibri" pitchFamily="34" charset="-120"/>
               </a:rPr>
-              <a:t>44–48pp</a:t>
+              <a:t>42–45pp</a:t>
             </a:r>
             <a:endParaRPr lang="en-US" sz="4000" dirty="0"/>
           </a:p>
@@ -3409,7 +3409,7 @@
                 <a:ea typeface="Calibri" pitchFamily="34" charset="-122"/>
                 <a:cs typeface="Calibri" pitchFamily="34" charset="-120"/>
               </a:rPr>
-              <a:t>377</a:t>
+              <a:t>472</a:t>
             </a:r>
             <a:endParaRPr lang="en-US" sz="4000" dirty="0"/>
           </a:p>
@@ -3448,7 +3448,7 @@
                 <a:ea typeface="Calibri" pitchFamily="34" charset="-122"/>
                 <a:cs typeface="Calibri" pitchFamily="34" charset="-120"/>
               </a:rPr>
-              <a:t>postings, 52 employers</a:t>
+              <a:t>postings, 86 employers</a:t>
             </a:r>
             <a:endParaRPr lang="en-US" sz="1200" dirty="0"/>
           </a:p>
@@ -3514,7 +3514,7 @@
                 <a:ea typeface="Calibri" pitchFamily="34" charset="-122"/>
                 <a:cs typeface="Calibri" pitchFamily="34" charset="-120"/>
               </a:rPr>
-              <a:t>4</a:t>
+              <a:t>6</a:t>
             </a:r>
             <a:endParaRPr lang="en-US" sz="4000" dirty="0"/>
           </a:p>
@@ -3623,7 +3623,7 @@
                 <a:ea typeface="Calibri" pitchFamily="34" charset="-122"/>
                 <a:cs typeface="Calibri" pitchFamily="34" charset="-120"/>
               </a:rPr>
-              <a:t>Within disclosed pay, seniority, a Northeast location, yrs_exp_min, a stated cloud skill are the only attributes distinguishable from zero — a stated cloud skill only narrowly, so read it as tentative; a Northeast location does not survive price adjustment</a:t>
+              <a:t>Within disclosed pay, seniority, yrs_exp_min, a stated cloud skill, a Northeast location, a West location, a STEM degree are the only attributes distinguishable from zero — a STEM degree and a West location only narrowly, so read them as tentative; a Northeast location and a West location do not survive price adjustment</a:t>
             </a:r>
             <a:endParaRPr lang="en-US" sz="1500" dirty="0"/>
           </a:p>
@@ -3647,7 +3647,7 @@
                 <a:ea typeface="Calibri" pitchFamily="34" charset="-122"/>
                 <a:cs typeface="Calibri" pitchFamily="34" charset="-120"/>
               </a:rPr>
-              <a:t>2 coefficients reach significance under clustered standard errors and do NOT survive the wild cluster bootstrap — reported as inconclusive, not as findings</a:t>
+              <a:t>1 coefficients reach significance under clustered standard errors and do NOT survive the wild cluster bootstrap — reported as inconclusive, not as findings</a:t>
             </a:r>
             <a:endParaRPr lang="en-US" sz="1500" dirty="0"/>
           </a:p>
@@ -4272,7 +4272,7 @@
                 <a:ea typeface="Calibri" pitchFamily="34" charset="-122"/>
                 <a:cs typeface="Calibri" pitchFamily="34" charset="-120"/>
               </a:rPr>
-              <a:t>Clustered errors cover at 92% against a nominal 95%. Significance is read off a wild cluster bootstrap, which leaves 4 predictor(s) standing: seniority, a Northeast location, yrs_exp_min, a stated cloud skill.</a:t>
+              <a:t>Clustered errors cover at 92% against a nominal 95%. Significance is read off a wild cluster bootstrap, which leaves 6 predictor(s) standing: seniority, yrs_exp_min, a stated cloud skill, a Northeast location, a West location, a STEM degree.</a:t>
             </a:r>
             <a:endParaRPr lang="en-US" sz="1300" dirty="0"/>
           </a:p>

--- a/paper/presentation.pptx
+++ b/paper/presentation.pptx
@@ -509,7 +509,7 @@
           <a:p>
             <a:r>
               <a:rPr lang="en-US" dirty="0"/>
-              <a:t>Current estimation sample: 472 postings with a disclosed pay range. The dependent variable is the log of the midpoint of the employer-stated range, annualized.</a:t>
+              <a:t>Current estimation sample: 531 postings with a disclosed pay range. The dependent variable is the log of the midpoint of the employer-stated range, annualized.</a:t>
             </a:r>
             <a:endParaRPr lang="en-US" dirty="0"/>
           </a:p>
@@ -2656,7 +2656,7 @@
                 <a:ea typeface="Calibri" pitchFamily="34" charset="-122"/>
                 <a:cs typeface="Calibri" pitchFamily="34" charset="-120"/>
               </a:rPr>
-              <a:t>disclose (n=384)</a:t>
+              <a:t>disclose (n=438)</a:t>
             </a:r>
             <a:endParaRPr lang="en-US" sz="1200" dirty="0"/>
           </a:p>
@@ -2722,7 +2722,7 @@
                 <a:ea typeface="Calibri" pitchFamily="34" charset="-122"/>
                 <a:cs typeface="Calibri" pitchFamily="34" charset="-120"/>
               </a:rPr>
-              <a:t>49%</a:t>
+              <a:t>48%</a:t>
             </a:r>
             <a:endParaRPr lang="en-US" sz="4000" dirty="0"/>
           </a:p>
@@ -2761,7 +2761,7 @@
                 <a:ea typeface="Calibri" pitchFamily="34" charset="-122"/>
                 <a:cs typeface="Calibri" pitchFamily="34" charset="-120"/>
               </a:rPr>
-              <a:t>disclose without one (n=247)</a:t>
+              <a:t>disclose without one (n=272)</a:t>
             </a:r>
             <a:endParaRPr lang="en-US" sz="1200" dirty="0"/>
           </a:p>
@@ -3041,7 +3041,7 @@
                 <a:ea typeface="Calibri" pitchFamily="34" charset="-122"/>
                 <a:cs typeface="Calibri" pitchFamily="34" charset="-120"/>
               </a:rPr>
-              <a:t>Retrieved: 8226</a:t>
+              <a:t>Retrieved: 12441</a:t>
             </a:r>
             <a:endParaRPr lang="en-US" sz="1400" dirty="0"/>
           </a:p>
@@ -3062,7 +3062,7 @@
                 <a:ea typeface="Calibri" pitchFamily="34" charset="-122"/>
                 <a:cs typeface="Calibri" pitchFamily="34" charset="-120"/>
               </a:rPr>
-              <a:t>Passed screens: 2044</a:t>
+              <a:t>Passed screens: 2923</a:t>
             </a:r>
             <a:endParaRPr lang="en-US" sz="1400" dirty="0"/>
           </a:p>
@@ -3083,7 +3083,7 @@
                 <a:ea typeface="Calibri" pitchFamily="34" charset="-122"/>
                 <a:cs typeface="Calibri" pitchFamily="34" charset="-120"/>
               </a:rPr>
-              <a:t>Located in the US: 1530</a:t>
+              <a:t>Located in the US: 2183</a:t>
             </a:r>
             <a:endParaRPr lang="en-US" sz="1400" dirty="0"/>
           </a:p>
@@ -3104,7 +3104,7 @@
                 <a:ea typeface="Calibri" pitchFamily="34" charset="-122"/>
                 <a:cs typeface="Calibri" pitchFamily="34" charset="-120"/>
               </a:rPr>
-              <a:t>Unique postings: 631</a:t>
+              <a:t>Unique postings: 710</a:t>
             </a:r>
             <a:endParaRPr lang="en-US" sz="1400" dirty="0"/>
           </a:p>
@@ -3125,7 +3125,7 @@
                 <a:ea typeface="Calibri" pitchFamily="34" charset="-122"/>
                 <a:cs typeface="Calibri" pitchFamily="34" charset="-120"/>
               </a:rPr>
-              <a:t>Pay disclosed: 472</a:t>
+              <a:t>Pay disclosed: 531</a:t>
             </a:r>
             <a:endParaRPr lang="en-US" sz="1400" dirty="0"/>
           </a:p>
@@ -3304,7 +3304,7 @@
                 <a:ea typeface="Calibri" pitchFamily="34" charset="-122"/>
                 <a:cs typeface="Calibri" pitchFamily="34" charset="-120"/>
               </a:rPr>
-              <a:t>42–45pp</a:t>
+              <a:t>43–45pp</a:t>
             </a:r>
             <a:endParaRPr lang="en-US" sz="4000" dirty="0"/>
           </a:p>
@@ -3409,7 +3409,7 @@
                 <a:ea typeface="Calibri" pitchFamily="34" charset="-122"/>
                 <a:cs typeface="Calibri" pitchFamily="34" charset="-120"/>
               </a:rPr>
-              <a:t>472</a:t>
+              <a:t>531</a:t>
             </a:r>
             <a:endParaRPr lang="en-US" sz="4000" dirty="0"/>
           </a:p>
@@ -3448,7 +3448,7 @@
                 <a:ea typeface="Calibri" pitchFamily="34" charset="-122"/>
                 <a:cs typeface="Calibri" pitchFamily="34" charset="-120"/>
               </a:rPr>
-              <a:t>postings, 86 employers</a:t>
+              <a:t>postings, 99 employers</a:t>
             </a:r>
             <a:endParaRPr lang="en-US" sz="1200" dirty="0"/>
           </a:p>
@@ -3514,7 +3514,7 @@
                 <a:ea typeface="Calibri" pitchFamily="34" charset="-122"/>
                 <a:cs typeface="Calibri" pitchFamily="34" charset="-120"/>
               </a:rPr>
-              <a:t>6</a:t>
+              <a:t>7</a:t>
             </a:r>
             <a:endParaRPr lang="en-US" sz="4000" dirty="0"/>
           </a:p>
@@ -3623,7 +3623,7 @@
                 <a:ea typeface="Calibri" pitchFamily="34" charset="-122"/>
                 <a:cs typeface="Calibri" pitchFamily="34" charset="-120"/>
               </a:rPr>
-              <a:t>Within disclosed pay, seniority, yrs_exp_min, a stated cloud skill, a Northeast location, a West location, a STEM degree are the only attributes distinguishable from zero — a STEM degree and a West location only narrowly, so read them as tentative; a Northeast location and a West location do not survive price adjustment</a:t>
+              <a:t>Within disclosed pay, seniority, required experience, a stated cloud skill, a Northeast location, a West location, stating an experience minimum and a STEM degree are the only attributes distinguishable from zero — stating an experience minimum, a STEM degree and a West location only narrowly, so read them as tentative; a Northeast location and a West location do not survive price adjustment</a:t>
             </a:r>
             <a:endParaRPr lang="en-US" sz="1500" dirty="0"/>
           </a:p>
@@ -3647,7 +3647,7 @@
                 <a:ea typeface="Calibri" pitchFamily="34" charset="-122"/>
                 <a:cs typeface="Calibri" pitchFamily="34" charset="-120"/>
               </a:rPr>
-              <a:t>1 coefficients reach significance under clustered standard errors and do NOT survive the wild cluster bootstrap — reported as inconclusive, not as findings</a:t>
+              <a:t>3 coefficients reach significance under clustered standard errors and do NOT survive the wild cluster bootstrap — reported as inconclusive, not as findings</a:t>
             </a:r>
             <a:endParaRPr lang="en-US" sz="1500" dirty="0"/>
           </a:p>
@@ -4272,7 +4272,7 @@
                 <a:ea typeface="Calibri" pitchFamily="34" charset="-122"/>
                 <a:cs typeface="Calibri" pitchFamily="34" charset="-120"/>
               </a:rPr>
-              <a:t>Clustered errors cover at 92% against a nominal 95%. Significance is read off a wild cluster bootstrap, which leaves 6 predictor(s) standing: seniority, yrs_exp_min, a stated cloud skill, a Northeast location, a West location, a STEM degree.</a:t>
+              <a:t>Clustered errors cover at 92% against a nominal 95%. Significance is read off a wild cluster bootstrap, which leaves 7 predictor(s) standing: seniority, required experience, a stated cloud skill, a Northeast location, a West location, stating an experience minimum, a STEM degree.</a:t>
             </a:r>
             <a:endParaRPr lang="en-US" sz="1300" dirty="0"/>
           </a:p>

--- a/paper/presentation.pptx
+++ b/paper/presentation.pptx
@@ -509,7 +509,7 @@
           <a:p>
             <a:r>
               <a:rPr lang="en-US" dirty="0"/>
-              <a:t>Current estimation sample: 531 postings with a disclosed pay range. The dependent variable is the log of the midpoint of the employer-stated range, annualized.</a:t>
+              <a:t>Current estimation sample: 536 postings with a disclosed pay range. The dependent variable is the log of the midpoint of the employer-stated range, annualized.</a:t>
             </a:r>
             <a:endParaRPr lang="en-US" dirty="0"/>
           </a:p>
@@ -2617,7 +2617,7 @@
                 <a:ea typeface="Calibri" pitchFamily="34" charset="-122"/>
                 <a:cs typeface="Calibri" pitchFamily="34" charset="-120"/>
               </a:rPr>
-              <a:t>92%</a:t>
+              <a:t>91%</a:t>
             </a:r>
             <a:endParaRPr lang="en-US" sz="4000" dirty="0"/>
           </a:p>
@@ -2656,7 +2656,7 @@
                 <a:ea typeface="Calibri" pitchFamily="34" charset="-122"/>
                 <a:cs typeface="Calibri" pitchFamily="34" charset="-120"/>
               </a:rPr>
-              <a:t>disclose (n=438)</a:t>
+              <a:t>disclose (n=443)</a:t>
             </a:r>
             <a:endParaRPr lang="en-US" sz="1200" dirty="0"/>
           </a:p>
@@ -2761,7 +2761,7 @@
                 <a:ea typeface="Calibri" pitchFamily="34" charset="-122"/>
                 <a:cs typeface="Calibri" pitchFamily="34" charset="-120"/>
               </a:rPr>
-              <a:t>disclose without one (n=272)</a:t>
+              <a:t>disclose without one (n=277)</a:t>
             </a:r>
             <a:endParaRPr lang="en-US" sz="1200" dirty="0"/>
           </a:p>
@@ -3041,7 +3041,7 @@
                 <a:ea typeface="Calibri" pitchFamily="34" charset="-122"/>
                 <a:cs typeface="Calibri" pitchFamily="34" charset="-120"/>
               </a:rPr>
-              <a:t>Retrieved: 12441</a:t>
+              <a:t>Retrieved: 12680</a:t>
             </a:r>
             <a:endParaRPr lang="en-US" sz="1400" dirty="0"/>
           </a:p>
@@ -3062,7 +3062,7 @@
                 <a:ea typeface="Calibri" pitchFamily="34" charset="-122"/>
                 <a:cs typeface="Calibri" pitchFamily="34" charset="-120"/>
               </a:rPr>
-              <a:t>Passed screens: 2923</a:t>
+              <a:t>Passed screens: 3081</a:t>
             </a:r>
             <a:endParaRPr lang="en-US" sz="1400" dirty="0"/>
           </a:p>
@@ -3083,7 +3083,7 @@
                 <a:ea typeface="Calibri" pitchFamily="34" charset="-122"/>
                 <a:cs typeface="Calibri" pitchFamily="34" charset="-120"/>
               </a:rPr>
-              <a:t>Located in the US: 2183</a:t>
+              <a:t>Located in the US: 2338</a:t>
             </a:r>
             <a:endParaRPr lang="en-US" sz="1400" dirty="0"/>
           </a:p>
@@ -3104,7 +3104,7 @@
                 <a:ea typeface="Calibri" pitchFamily="34" charset="-122"/>
                 <a:cs typeface="Calibri" pitchFamily="34" charset="-120"/>
               </a:rPr>
-              <a:t>Unique postings: 710</a:t>
+              <a:t>Unique postings: 720</a:t>
             </a:r>
             <a:endParaRPr lang="en-US" sz="1400" dirty="0"/>
           </a:p>
@@ -3125,7 +3125,7 @@
                 <a:ea typeface="Calibri" pitchFamily="34" charset="-122"/>
                 <a:cs typeface="Calibri" pitchFamily="34" charset="-120"/>
               </a:rPr>
-              <a:t>Pay disclosed: 531</a:t>
+              <a:t>Pay disclosed: 536</a:t>
             </a:r>
             <a:endParaRPr lang="en-US" sz="1400" dirty="0"/>
           </a:p>
@@ -3409,7 +3409,7 @@
                 <a:ea typeface="Calibri" pitchFamily="34" charset="-122"/>
                 <a:cs typeface="Calibri" pitchFamily="34" charset="-120"/>
               </a:rPr>
-              <a:t>531</a:t>
+              <a:t>536</a:t>
             </a:r>
             <a:endParaRPr lang="en-US" sz="4000" dirty="0"/>
           </a:p>
@@ -3623,7 +3623,7 @@
                 <a:ea typeface="Calibri" pitchFamily="34" charset="-122"/>
                 <a:cs typeface="Calibri" pitchFamily="34" charset="-120"/>
               </a:rPr>
-              <a:t>Within disclosed pay, seniority, required experience, a stated cloud skill, a Northeast location, a West location, stating an experience minimum and a STEM degree are the only attributes distinguishable from zero — stating an experience minimum, a STEM degree and a West location only narrowly, so read them as tentative; a Northeast location and a West location do not survive price adjustment</a:t>
+              <a:t>Within disclosed pay, seniority, required experience, a stated cloud skill, a West location, a Northeast location, stating an experience minimum and a STEM degree are the only attributes distinguishable from zero — stating an experience minimum, a STEM degree and a West location only narrowly, so read them as tentative; a Northeast location and a West location do not survive price adjustment</a:t>
             </a:r>
             <a:endParaRPr lang="en-US" sz="1500" dirty="0"/>
           </a:p>
@@ -4272,7 +4272,7 @@
                 <a:ea typeface="Calibri" pitchFamily="34" charset="-122"/>
                 <a:cs typeface="Calibri" pitchFamily="34" charset="-120"/>
               </a:rPr>
-              <a:t>Clustered errors cover at 92% against a nominal 95%. Significance is read off a wild cluster bootstrap, which leaves 7 predictor(s) standing: seniority, required experience, a stated cloud skill, a Northeast location, a West location, stating an experience minimum, a STEM degree.</a:t>
+              <a:t>Clustered errors cover at 92% against a nominal 95%. Significance is read off a wild cluster bootstrap, which leaves 7 predictor(s) standing: seniority, required experience, a stated cloud skill, a West location, a Northeast location, stating an experience minimum, a STEM degree.</a:t>
             </a:r>
             <a:endParaRPr lang="en-US" sz="1300" dirty="0"/>
           </a:p>

--- a/paper/presentation.pptx
+++ b/paper/presentation.pptx
@@ -509,7 +509,7 @@
           <a:p>
             <a:r>
               <a:rPr lang="en-US" dirty="0"/>
-              <a:t>Current estimation sample: 536 postings with a disclosed pay range. The dependent variable is the log of the midpoint of the employer-stated range, annualized.</a:t>
+              <a:t>Current estimation sample: 543 postings with a disclosed pay range. The dependent variable is the log of the midpoint of the employer-stated range, annualized.</a:t>
             </a:r>
             <a:endParaRPr lang="en-US" dirty="0"/>
           </a:p>
@@ -2656,7 +2656,7 @@
                 <a:ea typeface="Calibri" pitchFamily="34" charset="-122"/>
                 <a:cs typeface="Calibri" pitchFamily="34" charset="-120"/>
               </a:rPr>
-              <a:t>disclose (n=443)</a:t>
+              <a:t>disclose (n=449)</a:t>
             </a:r>
             <a:endParaRPr lang="en-US" sz="1200" dirty="0"/>
           </a:p>
@@ -2761,7 +2761,7 @@
                 <a:ea typeface="Calibri" pitchFamily="34" charset="-122"/>
                 <a:cs typeface="Calibri" pitchFamily="34" charset="-120"/>
               </a:rPr>
-              <a:t>disclose without one (n=277)</a:t>
+              <a:t>disclose without one (n=280)</a:t>
             </a:r>
             <a:endParaRPr lang="en-US" sz="1200" dirty="0"/>
           </a:p>
@@ -3041,7 +3041,7 @@
                 <a:ea typeface="Calibri" pitchFamily="34" charset="-122"/>
                 <a:cs typeface="Calibri" pitchFamily="34" charset="-120"/>
               </a:rPr>
-              <a:t>Retrieved: 12680</a:t>
+              <a:t>Retrieved: 17495</a:t>
             </a:r>
             <a:endParaRPr lang="en-US" sz="1400" dirty="0"/>
           </a:p>
@@ -3062,7 +3062,7 @@
                 <a:ea typeface="Calibri" pitchFamily="34" charset="-122"/>
                 <a:cs typeface="Calibri" pitchFamily="34" charset="-120"/>
               </a:rPr>
-              <a:t>Passed screens: 3081</a:t>
+              <a:t>Passed screens: 4395</a:t>
             </a:r>
             <a:endParaRPr lang="en-US" sz="1400" dirty="0"/>
           </a:p>
@@ -3083,7 +3083,7 @@
                 <a:ea typeface="Calibri" pitchFamily="34" charset="-122"/>
                 <a:cs typeface="Calibri" pitchFamily="34" charset="-120"/>
               </a:rPr>
-              <a:t>Located in the US: 2338</a:t>
+              <a:t>Located in the US: 3427</a:t>
             </a:r>
             <a:endParaRPr lang="en-US" sz="1400" dirty="0"/>
           </a:p>
@@ -3104,7 +3104,7 @@
                 <a:ea typeface="Calibri" pitchFamily="34" charset="-122"/>
                 <a:cs typeface="Calibri" pitchFamily="34" charset="-120"/>
               </a:rPr>
-              <a:t>Unique postings: 720</a:t>
+              <a:t>Unique postings: 729</a:t>
             </a:r>
             <a:endParaRPr lang="en-US" sz="1400" dirty="0"/>
           </a:p>
@@ -3125,7 +3125,7 @@
                 <a:ea typeface="Calibri" pitchFamily="34" charset="-122"/>
                 <a:cs typeface="Calibri" pitchFamily="34" charset="-120"/>
               </a:rPr>
-              <a:t>Pay disclosed: 536</a:t>
+              <a:t>Pay disclosed: 543</a:t>
             </a:r>
             <a:endParaRPr lang="en-US" sz="1400" dirty="0"/>
           </a:p>
@@ -3409,7 +3409,7 @@
                 <a:ea typeface="Calibri" pitchFamily="34" charset="-122"/>
                 <a:cs typeface="Calibri" pitchFamily="34" charset="-120"/>
               </a:rPr>
-              <a:t>536</a:t>
+              <a:t>543</a:t>
             </a:r>
             <a:endParaRPr lang="en-US" sz="4000" dirty="0"/>
           </a:p>
@@ -3448,7 +3448,7 @@
                 <a:ea typeface="Calibri" pitchFamily="34" charset="-122"/>
                 <a:cs typeface="Calibri" pitchFamily="34" charset="-120"/>
               </a:rPr>
-              <a:t>postings, 99 employers</a:t>
+              <a:t>postings, 100 employers</a:t>
             </a:r>
             <a:endParaRPr lang="en-US" sz="1200" dirty="0"/>
           </a:p>
@@ -3623,7 +3623,7 @@
                 <a:ea typeface="Calibri" pitchFamily="34" charset="-122"/>
                 <a:cs typeface="Calibri" pitchFamily="34" charset="-120"/>
               </a:rPr>
-              <a:t>Within disclosed pay, seniority, required experience, a stated cloud skill, a West location, a Northeast location, stating an experience minimum and a STEM degree are the only attributes distinguishable from zero — stating an experience minimum, a STEM degree and a West location only narrowly, so read them as tentative; a Northeast location and a West location do not survive price adjustment</a:t>
+              <a:t>Within disclosed pay, seniority, required experience, a stated cloud skill, a West location, a Northeast location, stating an experience minimum and a STEM degree are the only attributes distinguishable from zero — stating an experience minimum, a STEM degree, a Northeast location and a West location only narrowly, so read them as tentative; a Northeast location and a West location do not survive price adjustment</a:t>
             </a:r>
             <a:endParaRPr lang="en-US" sz="1500" dirty="0"/>
           </a:p>
@@ -3647,7 +3647,7 @@
                 <a:ea typeface="Calibri" pitchFamily="34" charset="-122"/>
                 <a:cs typeface="Calibri" pitchFamily="34" charset="-120"/>
               </a:rPr>
-              <a:t>3 coefficients reach significance under clustered standard errors and do NOT survive the wild cluster bootstrap — reported as inconclusive, not as findings</a:t>
+              <a:t>2 coefficients reach significance under clustered standard errors and do NOT survive the wild cluster bootstrap — reported as inconclusive, not as findings</a:t>
             </a:r>
             <a:endParaRPr lang="en-US" sz="1500" dirty="0"/>
           </a:p>
